--- a/P3/Dissemination/P3_Presentation.pptx
+++ b/P3/Dissemination/P3_Presentation.pptx
@@ -4,6 +4,9 @@
   <p:sldMasterIdLst>
     <p:sldMasterId id="2147483648" r:id="rId1"/>
   </p:sldMasterIdLst>
+  <p:notesMasterIdLst>
+    <p:notesMasterId r:id="rId9"/>
+  </p:notesMasterIdLst>
   <p:sldIdLst>
     <p:sldId id="256" r:id="rId2"/>
     <p:sldId id="257" r:id="rId3"/>
@@ -110,13 +113,18 @@
       </a:defRPr>
     </a:lvl9pPr>
   </p:defaultTextStyle>
+  <p:extLst>
+    <p:ext uri="{EFAFB233-063F-42B5-8137-9DF3F51BA10A}">
+      <p15:sldGuideLst xmlns:p15="http://schemas.microsoft.com/office/powerpoint/2012/main"/>
+    </p:ext>
+  </p:extLst>
 </p:presentation>
 </file>
 
 <file path=ppt/revisionInfo.xml><?xml version="1.0" encoding="utf-8"?>
 <p1510:revInfo xmlns:a="http://schemas.openxmlformats.org/drawingml/2006/main" xmlns:r="http://schemas.openxmlformats.org/officeDocument/2006/relationships" xmlns:p1510="http://schemas.microsoft.com/office/powerpoint/2015/10/main">
   <p1510:revLst>
-    <p1510:client id="{BEC04B46-FE1E-4D20-939F-8D111E749FBF}" v="8" dt="2026-04-21T20:43:05.820"/>
+    <p1510:client id="{BEC04B46-FE1E-4D20-939F-8D111E749FBF}" v="20" dt="2026-04-22T15:46:06.178"/>
   </p1510:revLst>
 </p1510:revInfo>
 </file>
@@ -125,8 +133,8 @@
 <pc:chgInfo xmlns:a="http://schemas.openxmlformats.org/drawingml/2006/main" xmlns:r="http://schemas.openxmlformats.org/officeDocument/2006/relationships" xmlns:ac="http://schemas.microsoft.com/office/drawing/2013/main/command" xmlns:pc="http://schemas.microsoft.com/office/powerpoint/2013/main/command">
   <pc:docChgLst>
     <pc:chgData name="Ezra Weible" userId="67bcaf2f89c4552e" providerId="LiveId" clId="{E4E19776-AA89-4579-B0CB-50FEF10C4E93}"/>
-    <pc:docChg chg="custSel addSld modSld sldOrd">
-      <pc:chgData name="Ezra Weible" userId="67bcaf2f89c4552e" providerId="LiveId" clId="{E4E19776-AA89-4579-B0CB-50FEF10C4E93}" dt="2026-04-21T20:43:05.820" v="439"/>
+    <pc:docChg chg="undo custSel addSld modSld sldOrd">
+      <pc:chgData name="Ezra Weible" userId="67bcaf2f89c4552e" providerId="LiveId" clId="{E4E19776-AA89-4579-B0CB-50FEF10C4E93}" dt="2026-04-22T15:46:18.638" v="2136" actId="27636"/>
       <pc:docMkLst>
         <pc:docMk/>
       </pc:docMkLst>
@@ -153,8 +161,8 @@
           </ac:spMkLst>
         </pc:spChg>
       </pc:sldChg>
-      <pc:sldChg chg="modSp new mod">
-        <pc:chgData name="Ezra Weible" userId="67bcaf2f89c4552e" providerId="LiveId" clId="{E4E19776-AA89-4579-B0CB-50FEF10C4E93}" dt="2026-04-21T20:43:05.820" v="439"/>
+      <pc:sldChg chg="modSp new mod modNotesTx">
+        <pc:chgData name="Ezra Weible" userId="67bcaf2f89c4552e" providerId="LiveId" clId="{E4E19776-AA89-4579-B0CB-50FEF10C4E93}" dt="2026-04-22T15:34:58.097" v="751" actId="20577"/>
         <pc:sldMkLst>
           <pc:docMk/>
           <pc:sldMk cId="285601417" sldId="257"/>
@@ -168,7 +176,7 @@
           </ac:spMkLst>
         </pc:spChg>
         <pc:spChg chg="mod">
-          <ac:chgData name="Ezra Weible" userId="67bcaf2f89c4552e" providerId="LiveId" clId="{E4E19776-AA89-4579-B0CB-50FEF10C4E93}" dt="2026-04-21T20:43:05.820" v="439"/>
+          <ac:chgData name="Ezra Weible" userId="67bcaf2f89c4552e" providerId="LiveId" clId="{E4E19776-AA89-4579-B0CB-50FEF10C4E93}" dt="2026-04-22T15:34:38.306" v="749" actId="20577"/>
           <ac:spMkLst>
             <pc:docMk/>
             <pc:sldMk cId="285601417" sldId="257"/>
@@ -177,7 +185,7 @@
         </pc:spChg>
       </pc:sldChg>
       <pc:sldChg chg="addSp delSp modSp new mod">
-        <pc:chgData name="Ezra Weible" userId="67bcaf2f89c4552e" providerId="LiveId" clId="{E4E19776-AA89-4579-B0CB-50FEF10C4E93}" dt="2026-04-21T20:41:23.663" v="170" actId="1076"/>
+        <pc:chgData name="Ezra Weible" userId="67bcaf2f89c4552e" providerId="LiveId" clId="{E4E19776-AA89-4579-B0CB-50FEF10C4E93}" dt="2026-04-22T15:37:57.799" v="797" actId="1076"/>
         <pc:sldMkLst>
           <pc:docMk/>
           <pc:sldMk cId="1924820200" sldId="258"/>
@@ -198,8 +206,64 @@
             <ac:spMk id="3" creationId="{02B4C20A-45B8-F813-9067-F41F429F242C}"/>
           </ac:spMkLst>
         </pc:spChg>
-        <pc:picChg chg="add mod ord">
-          <ac:chgData name="Ezra Weible" userId="67bcaf2f89c4552e" providerId="LiveId" clId="{E4E19776-AA89-4579-B0CB-50FEF10C4E93}" dt="2026-04-21T20:41:20.433" v="169" actId="1076"/>
+        <pc:spChg chg="add del mod">
+          <ac:chgData name="Ezra Weible" userId="67bcaf2f89c4552e" providerId="LiveId" clId="{E4E19776-AA89-4579-B0CB-50FEF10C4E93}" dt="2026-04-22T15:31:53.326" v="442" actId="931"/>
+          <ac:spMkLst>
+            <pc:docMk/>
+            <pc:sldMk cId="1924820200" sldId="258"/>
+            <ac:spMk id="4" creationId="{03D22A0C-99CE-A233-C704-37DEE99D6FE5}"/>
+          </ac:spMkLst>
+        </pc:spChg>
+        <pc:spChg chg="add del mod">
+          <ac:chgData name="Ezra Weible" userId="67bcaf2f89c4552e" providerId="LiveId" clId="{E4E19776-AA89-4579-B0CB-50FEF10C4E93}" dt="2026-04-22T15:36:10.102" v="775" actId="478"/>
+          <ac:spMkLst>
+            <pc:docMk/>
+            <pc:sldMk cId="1924820200" sldId="258"/>
+            <ac:spMk id="12" creationId="{7D2A54E4-DDEE-DBE7-6B9D-ABAD2CCC2BEA}"/>
+          </ac:spMkLst>
+        </pc:spChg>
+        <pc:spChg chg="add mod">
+          <ac:chgData name="Ezra Weible" userId="67bcaf2f89c4552e" providerId="LiveId" clId="{E4E19776-AA89-4579-B0CB-50FEF10C4E93}" dt="2026-04-22T15:37:02.428" v="782" actId="14100"/>
+          <ac:spMkLst>
+            <pc:docMk/>
+            <pc:sldMk cId="1924820200" sldId="258"/>
+            <ac:spMk id="13" creationId="{A86ACD78-64A8-7975-40F9-91464DD2F39A}"/>
+          </ac:spMkLst>
+        </pc:spChg>
+        <pc:spChg chg="add mod">
+          <ac:chgData name="Ezra Weible" userId="67bcaf2f89c4552e" providerId="LiveId" clId="{E4E19776-AA89-4579-B0CB-50FEF10C4E93}" dt="2026-04-22T15:37:18.583" v="787" actId="14100"/>
+          <ac:spMkLst>
+            <pc:docMk/>
+            <pc:sldMk cId="1924820200" sldId="258"/>
+            <ac:spMk id="14" creationId="{C6FE9B22-563C-6C9E-5825-F94F79ABC8C6}"/>
+          </ac:spMkLst>
+        </pc:spChg>
+        <pc:spChg chg="add mod">
+          <ac:chgData name="Ezra Weible" userId="67bcaf2f89c4552e" providerId="LiveId" clId="{E4E19776-AA89-4579-B0CB-50FEF10C4E93}" dt="2026-04-22T15:37:24.587" v="790" actId="14100"/>
+          <ac:spMkLst>
+            <pc:docMk/>
+            <pc:sldMk cId="1924820200" sldId="258"/>
+            <ac:spMk id="15" creationId="{F2E66094-0716-976F-2AC6-DBE7C1344DD4}"/>
+          </ac:spMkLst>
+        </pc:spChg>
+        <pc:spChg chg="add mod">
+          <ac:chgData name="Ezra Weible" userId="67bcaf2f89c4552e" providerId="LiveId" clId="{E4E19776-AA89-4579-B0CB-50FEF10C4E93}" dt="2026-04-22T15:37:31.722" v="793" actId="14100"/>
+          <ac:spMkLst>
+            <pc:docMk/>
+            <pc:sldMk cId="1924820200" sldId="258"/>
+            <ac:spMk id="16" creationId="{630DAEE0-7E66-4F6F-482F-496287E413E3}"/>
+          </ac:spMkLst>
+        </pc:spChg>
+        <pc:spChg chg="add del">
+          <ac:chgData name="Ezra Weible" userId="67bcaf2f89c4552e" providerId="LiveId" clId="{E4E19776-AA89-4579-B0CB-50FEF10C4E93}" dt="2026-04-22T15:37:50.782" v="795" actId="22"/>
+          <ac:spMkLst>
+            <pc:docMk/>
+            <pc:sldMk cId="1924820200" sldId="258"/>
+            <ac:spMk id="18" creationId="{8365995C-37AA-360A-7802-113B7DF039D5}"/>
+          </ac:spMkLst>
+        </pc:spChg>
+        <pc:picChg chg="add del mod ord">
+          <ac:chgData name="Ezra Weible" userId="67bcaf2f89c4552e" providerId="LiveId" clId="{E4E19776-AA89-4579-B0CB-50FEF10C4E93}" dt="2026-04-22T15:31:38.351" v="441" actId="478"/>
           <ac:picMkLst>
             <pc:docMk/>
             <pc:sldMk cId="1924820200" sldId="258"/>
@@ -214,17 +278,41 @@
             <ac:picMk id="7" creationId="{47801B78-452A-73C3-F3D3-56F8240FD9A8}"/>
           </ac:picMkLst>
         </pc:picChg>
-        <pc:picChg chg="add mod">
-          <ac:chgData name="Ezra Weible" userId="67bcaf2f89c4552e" providerId="LiveId" clId="{E4E19776-AA89-4579-B0CB-50FEF10C4E93}" dt="2026-04-21T20:41:23.663" v="170" actId="1076"/>
+        <pc:picChg chg="add mod ord">
+          <ac:chgData name="Ezra Weible" userId="67bcaf2f89c4552e" providerId="LiveId" clId="{E4E19776-AA89-4579-B0CB-50FEF10C4E93}" dt="2026-04-22T15:37:57.799" v="797" actId="1076"/>
+          <ac:picMkLst>
+            <pc:docMk/>
+            <pc:sldMk cId="1924820200" sldId="258"/>
+            <ac:picMk id="7" creationId="{712B5571-4803-A3FF-8712-ABCC7CD2165B}"/>
+          </ac:picMkLst>
+        </pc:picChg>
+        <pc:picChg chg="add del mod">
+          <ac:chgData name="Ezra Weible" userId="67bcaf2f89c4552e" providerId="LiveId" clId="{E4E19776-AA89-4579-B0CB-50FEF10C4E93}" dt="2026-04-22T15:31:34.295" v="440" actId="478"/>
           <ac:picMkLst>
             <pc:docMk/>
             <pc:sldMk cId="1924820200" sldId="258"/>
             <ac:picMk id="8" creationId="{47801B78-452A-73C3-F3D3-56F8240FD9A8}"/>
           </ac:picMkLst>
         </pc:picChg>
+        <pc:picChg chg="add mod modCrop">
+          <ac:chgData name="Ezra Weible" userId="67bcaf2f89c4552e" providerId="LiveId" clId="{E4E19776-AA89-4579-B0CB-50FEF10C4E93}" dt="2026-04-22T15:35:16.071" v="755" actId="1076"/>
+          <ac:picMkLst>
+            <pc:docMk/>
+            <pc:sldMk cId="1924820200" sldId="258"/>
+            <ac:picMk id="10" creationId="{18A96AB4-E7EA-E1DF-E2E8-042D9D56D4AD}"/>
+          </ac:picMkLst>
+        </pc:picChg>
+        <pc:inkChg chg="add del">
+          <ac:chgData name="Ezra Weible" userId="67bcaf2f89c4552e" providerId="LiveId" clId="{E4E19776-AA89-4579-B0CB-50FEF10C4E93}" dt="2026-04-22T15:35:38.773" v="757" actId="9405"/>
+          <ac:inkMkLst>
+            <pc:docMk/>
+            <pc:sldMk cId="1924820200" sldId="258"/>
+            <ac:inkMk id="11" creationId="{260AE93A-4BD7-E360-5ECA-0F8860786648}"/>
+          </ac:inkMkLst>
+        </pc:inkChg>
       </pc:sldChg>
       <pc:sldChg chg="addSp delSp modSp new mod">
-        <pc:chgData name="Ezra Weible" userId="67bcaf2f89c4552e" providerId="LiveId" clId="{E4E19776-AA89-4579-B0CB-50FEF10C4E93}" dt="2026-04-21T20:42:50.448" v="438" actId="20577"/>
+        <pc:chgData name="Ezra Weible" userId="67bcaf2f89c4552e" providerId="LiveId" clId="{E4E19776-AA89-4579-B0CB-50FEF10C4E93}" dt="2026-04-22T15:40:26.473" v="1387" actId="27636"/>
         <pc:sldMkLst>
           <pc:docMk/>
           <pc:sldMk cId="3654032851" sldId="259"/>
@@ -238,7 +326,7 @@
           </ac:spMkLst>
         </pc:spChg>
         <pc:spChg chg="mod">
-          <ac:chgData name="Ezra Weible" userId="67bcaf2f89c4552e" providerId="LiveId" clId="{E4E19776-AA89-4579-B0CB-50FEF10C4E93}" dt="2026-04-21T20:42:50.448" v="438" actId="20577"/>
+          <ac:chgData name="Ezra Weible" userId="67bcaf2f89c4552e" providerId="LiveId" clId="{E4E19776-AA89-4579-B0CB-50FEF10C4E93}" dt="2026-04-22T15:40:26.473" v="1387" actId="27636"/>
           <ac:spMkLst>
             <pc:docMk/>
             <pc:sldMk cId="3654032851" sldId="259"/>
@@ -255,7 +343,7 @@
         </pc:picChg>
       </pc:sldChg>
       <pc:sldChg chg="addSp delSp modSp new mod">
-        <pc:chgData name="Ezra Weible" userId="67bcaf2f89c4552e" providerId="LiveId" clId="{E4E19776-AA89-4579-B0CB-50FEF10C4E93}" dt="2026-04-21T20:38:45.005" v="104" actId="14100"/>
+        <pc:chgData name="Ezra Weible" userId="67bcaf2f89c4552e" providerId="LiveId" clId="{E4E19776-AA89-4579-B0CB-50FEF10C4E93}" dt="2026-04-22T15:44:16.859" v="1795" actId="1076"/>
         <pc:sldMkLst>
           <pc:docMk/>
           <pc:sldMk cId="1656911978" sldId="260"/>
@@ -276,33 +364,57 @@
             <ac:spMk id="3" creationId="{32F81578-ABD3-6B00-B92B-9944EBF01AF9}"/>
           </ac:spMkLst>
         </pc:spChg>
+        <pc:spChg chg="add del mod">
+          <ac:chgData name="Ezra Weible" userId="67bcaf2f89c4552e" providerId="LiveId" clId="{E4E19776-AA89-4579-B0CB-50FEF10C4E93}" dt="2026-04-22T15:42:33.842" v="1617" actId="931"/>
+          <ac:spMkLst>
+            <pc:docMk/>
+            <pc:sldMk cId="1656911978" sldId="260"/>
+            <ac:spMk id="4" creationId="{CCA80E21-B888-A3FF-CAF1-497CEBDA08E6}"/>
+          </ac:spMkLst>
+        </pc:spChg>
         <pc:spChg chg="add mod">
-          <ac:chgData name="Ezra Weible" userId="67bcaf2f89c4552e" providerId="LiveId" clId="{E4E19776-AA89-4579-B0CB-50FEF10C4E93}" dt="2026-04-21T20:38:45.005" v="104" actId="14100"/>
+          <ac:chgData name="Ezra Weible" userId="67bcaf2f89c4552e" providerId="LiveId" clId="{E4E19776-AA89-4579-B0CB-50FEF10C4E93}" dt="2026-04-22T15:44:16.859" v="1795" actId="1076"/>
           <ac:spMkLst>
             <pc:docMk/>
             <pc:sldMk cId="1656911978" sldId="260"/>
             <ac:spMk id="8" creationId="{396C594F-3E58-EF8A-C4BB-11AA81A1CEAE}"/>
           </ac:spMkLst>
         </pc:spChg>
-        <pc:picChg chg="add mod ord">
-          <ac:chgData name="Ezra Weible" userId="67bcaf2f89c4552e" providerId="LiveId" clId="{E4E19776-AA89-4579-B0CB-50FEF10C4E93}" dt="2026-04-21T20:38:22.336" v="99" actId="14100"/>
+        <pc:picChg chg="add del mod ord">
+          <ac:chgData name="Ezra Weible" userId="67bcaf2f89c4552e" providerId="LiveId" clId="{E4E19776-AA89-4579-B0CB-50FEF10C4E93}" dt="2026-04-22T15:42:27.628" v="1616" actId="478"/>
           <ac:picMkLst>
             <pc:docMk/>
             <pc:sldMk cId="1656911978" sldId="260"/>
             <ac:picMk id="5" creationId="{7C57EA02-2C12-D2AA-1656-C4FD0B992650}"/>
           </ac:picMkLst>
         </pc:picChg>
-        <pc:picChg chg="add mod">
-          <ac:chgData name="Ezra Weible" userId="67bcaf2f89c4552e" providerId="LiveId" clId="{E4E19776-AA89-4579-B0CB-50FEF10C4E93}" dt="2026-04-21T20:38:14.279" v="97" actId="1076"/>
+        <pc:picChg chg="add del mod">
+          <ac:chgData name="Ezra Weible" userId="67bcaf2f89c4552e" providerId="LiveId" clId="{E4E19776-AA89-4579-B0CB-50FEF10C4E93}" dt="2026-04-22T15:42:26.547" v="1615" actId="478"/>
           <ac:picMkLst>
             <pc:docMk/>
             <pc:sldMk cId="1656911978" sldId="260"/>
             <ac:picMk id="7" creationId="{83C40886-D2CA-91DD-DFD1-D67E8C928FC2}"/>
           </ac:picMkLst>
         </pc:picChg>
+        <pc:picChg chg="add mod ord">
+          <ac:chgData name="Ezra Weible" userId="67bcaf2f89c4552e" providerId="LiveId" clId="{E4E19776-AA89-4579-B0CB-50FEF10C4E93}" dt="2026-04-22T15:43:16.712" v="1630" actId="14100"/>
+          <ac:picMkLst>
+            <pc:docMk/>
+            <pc:sldMk cId="1656911978" sldId="260"/>
+            <ac:picMk id="9" creationId="{A6D67317-4ABE-579B-78EE-821A78042D5E}"/>
+          </ac:picMkLst>
+        </pc:picChg>
+        <pc:picChg chg="add mod modCrop">
+          <ac:chgData name="Ezra Weible" userId="67bcaf2f89c4552e" providerId="LiveId" clId="{E4E19776-AA89-4579-B0CB-50FEF10C4E93}" dt="2026-04-22T15:43:02.740" v="1626" actId="1076"/>
+          <ac:picMkLst>
+            <pc:docMk/>
+            <pc:sldMk cId="1656911978" sldId="260"/>
+            <ac:picMk id="11" creationId="{2AD7504C-248D-B497-B29B-74D544089112}"/>
+          </ac:picMkLst>
+        </pc:picChg>
       </pc:sldChg>
-      <pc:sldChg chg="addSp modSp new mod ord">
-        <pc:chgData name="Ezra Weible" userId="67bcaf2f89c4552e" providerId="LiveId" clId="{E4E19776-AA89-4579-B0CB-50FEF10C4E93}" dt="2026-04-21T20:40:35.304" v="153" actId="1076"/>
+      <pc:sldChg chg="addSp delSp modSp new mod ord">
+        <pc:chgData name="Ezra Weible" userId="67bcaf2f89c4552e" providerId="LiveId" clId="{E4E19776-AA89-4579-B0CB-50FEF10C4E93}" dt="2026-04-22T15:42:12.164" v="1614" actId="20577"/>
         <pc:sldMkLst>
           <pc:docMk/>
           <pc:sldMk cId="2512102046" sldId="261"/>
@@ -315,16 +427,40 @@
             <ac:spMk id="2" creationId="{9A8252EA-4605-9D0A-CDAD-218CFB1A2E8C}"/>
           </ac:spMkLst>
         </pc:spChg>
-        <pc:picChg chg="add mod">
-          <ac:chgData name="Ezra Weible" userId="67bcaf2f89c4552e" providerId="LiveId" clId="{E4E19776-AA89-4579-B0CB-50FEF10C4E93}" dt="2026-04-21T20:40:33.636" v="152" actId="1076"/>
+        <pc:spChg chg="del">
+          <ac:chgData name="Ezra Weible" userId="67bcaf2f89c4552e" providerId="LiveId" clId="{E4E19776-AA89-4579-B0CB-50FEF10C4E93}" dt="2026-04-22T15:40:38.076" v="1390" actId="931"/>
+          <ac:spMkLst>
+            <pc:docMk/>
+            <pc:sldMk cId="2512102046" sldId="261"/>
+            <ac:spMk id="3" creationId="{1B1F310C-5C01-8B70-EF9F-6053BBDC02C7}"/>
+          </ac:spMkLst>
+        </pc:spChg>
+        <pc:spChg chg="add mod">
+          <ac:chgData name="Ezra Weible" userId="67bcaf2f89c4552e" providerId="LiveId" clId="{E4E19776-AA89-4579-B0CB-50FEF10C4E93}" dt="2026-04-22T15:42:12.164" v="1614" actId="20577"/>
+          <ac:spMkLst>
+            <pc:docMk/>
+            <pc:sldMk cId="2512102046" sldId="261"/>
+            <ac:spMk id="8" creationId="{E663BFE3-C54D-53EF-0902-B4BE42F31E5D}"/>
+          </ac:spMkLst>
+        </pc:spChg>
+        <pc:picChg chg="add del mod">
+          <ac:chgData name="Ezra Weible" userId="67bcaf2f89c4552e" providerId="LiveId" clId="{E4E19776-AA89-4579-B0CB-50FEF10C4E93}" dt="2026-04-22T15:40:32.674" v="1389" actId="478"/>
           <ac:picMkLst>
             <pc:docMk/>
             <pc:sldMk cId="2512102046" sldId="261"/>
             <ac:picMk id="5" creationId="{21FE7651-357F-F9AF-3D1F-5A5452B8CF3F}"/>
           </ac:picMkLst>
         </pc:picChg>
-        <pc:picChg chg="add mod">
-          <ac:chgData name="Ezra Weible" userId="67bcaf2f89c4552e" providerId="LiveId" clId="{E4E19776-AA89-4579-B0CB-50FEF10C4E93}" dt="2026-04-21T20:40:35.304" v="153" actId="1076"/>
+        <pc:picChg chg="add mod ord">
+          <ac:chgData name="Ezra Weible" userId="67bcaf2f89c4552e" providerId="LiveId" clId="{E4E19776-AA89-4579-B0CB-50FEF10C4E93}" dt="2026-04-22T15:40:45.394" v="1392" actId="14100"/>
+          <ac:picMkLst>
+            <pc:docMk/>
+            <pc:sldMk cId="2512102046" sldId="261"/>
+            <ac:picMk id="6" creationId="{267B4AE3-B3F3-22AB-D0BE-088D33357BB2}"/>
+          </ac:picMkLst>
+        </pc:picChg>
+        <pc:picChg chg="add del mod">
+          <ac:chgData name="Ezra Weible" userId="67bcaf2f89c4552e" providerId="LiveId" clId="{E4E19776-AA89-4579-B0CB-50FEF10C4E93}" dt="2026-04-22T15:40:31.586" v="1388" actId="478"/>
           <ac:picMkLst>
             <pc:docMk/>
             <pc:sldMk cId="2512102046" sldId="261"/>
@@ -332,8 +468,8 @@
           </ac:picMkLst>
         </pc:picChg>
       </pc:sldChg>
-      <pc:sldChg chg="addSp modSp new mod">
-        <pc:chgData name="Ezra Weible" userId="67bcaf2f89c4552e" providerId="LiveId" clId="{E4E19776-AA89-4579-B0CB-50FEF10C4E93}" dt="2026-04-21T20:39:39.888" v="146" actId="14100"/>
+      <pc:sldChg chg="addSp delSp modSp new mod">
+        <pc:chgData name="Ezra Weible" userId="67bcaf2f89c4552e" providerId="LiveId" clId="{E4E19776-AA89-4579-B0CB-50FEF10C4E93}" dt="2026-04-22T15:46:18.638" v="2136" actId="27636"/>
         <pc:sldMkLst>
           <pc:docMk/>
           <pc:sldMk cId="461924241" sldId="262"/>
@@ -347,25 +483,750 @@
           </ac:spMkLst>
         </pc:spChg>
         <pc:spChg chg="mod">
-          <ac:chgData name="Ezra Weible" userId="67bcaf2f89c4552e" providerId="LiveId" clId="{E4E19776-AA89-4579-B0CB-50FEF10C4E93}" dt="2026-04-21T20:39:23.706" v="143" actId="20577"/>
+          <ac:chgData name="Ezra Weible" userId="67bcaf2f89c4552e" providerId="LiveId" clId="{E4E19776-AA89-4579-B0CB-50FEF10C4E93}" dt="2026-04-22T15:46:18.638" v="2136" actId="27636"/>
           <ac:spMkLst>
             <pc:docMk/>
             <pc:sldMk cId="461924241" sldId="262"/>
             <ac:spMk id="3" creationId="{4357437F-7CD9-CAC5-16E3-5940FF277C67}"/>
           </ac:spMkLst>
         </pc:spChg>
-        <pc:picChg chg="add mod">
-          <ac:chgData name="Ezra Weible" userId="67bcaf2f89c4552e" providerId="LiveId" clId="{E4E19776-AA89-4579-B0CB-50FEF10C4E93}" dt="2026-04-21T20:39:39.888" v="146" actId="14100"/>
+        <pc:picChg chg="add del mod">
+          <ac:chgData name="Ezra Weible" userId="67bcaf2f89c4552e" providerId="LiveId" clId="{E4E19776-AA89-4579-B0CB-50FEF10C4E93}" dt="2026-04-22T15:44:29.718" v="1796" actId="478"/>
           <ac:picMkLst>
             <pc:docMk/>
             <pc:sldMk cId="461924241" sldId="262"/>
             <ac:picMk id="5" creationId="{9CEA26D0-3315-CE79-4822-834DE7840E31}"/>
           </ac:picMkLst>
         </pc:picChg>
+        <pc:picChg chg="add mod">
+          <ac:chgData name="Ezra Weible" userId="67bcaf2f89c4552e" providerId="LiveId" clId="{E4E19776-AA89-4579-B0CB-50FEF10C4E93}" dt="2026-04-22T15:44:38.279" v="1798" actId="1076"/>
+          <ac:picMkLst>
+            <pc:docMk/>
+            <pc:sldMk cId="461924241" sldId="262"/>
+            <ac:picMk id="6" creationId="{567BF916-F4D4-0811-0248-421F8741936A}"/>
+          </ac:picMkLst>
+        </pc:picChg>
       </pc:sldChg>
     </pc:docChg>
   </pc:docChgLst>
 </pc:chgInfo>
+</file>
+
+<file path=ppt/notesMasters/notesMaster1.xml><?xml version="1.0" encoding="utf-8"?>
+<p:notesMaster xmlns:a="http://schemas.openxmlformats.org/drawingml/2006/main" xmlns:r="http://schemas.openxmlformats.org/officeDocument/2006/relationships" xmlns:p="http://schemas.openxmlformats.org/presentationml/2006/main">
+  <p:cSld>
+    <p:bg>
+      <p:bgRef idx="1001">
+        <a:schemeClr val="bg1"/>
+      </p:bgRef>
+    </p:bg>
+    <p:spTree>
+      <p:nvGrpSpPr>
+        <p:cNvPr id="1" name=""/>
+        <p:cNvGrpSpPr/>
+        <p:nvPr/>
+      </p:nvGrpSpPr>
+      <p:grpSpPr>
+        <a:xfrm>
+          <a:off x="0" y="0"/>
+          <a:ext cx="0" cy="0"/>
+          <a:chOff x="0" y="0"/>
+          <a:chExt cx="0" cy="0"/>
+        </a:xfrm>
+      </p:grpSpPr>
+      <p:sp>
+        <p:nvSpPr>
+          <p:cNvPr id="2" name="Header Placeholder 1"/>
+          <p:cNvSpPr>
+            <a:spLocks noGrp="1"/>
+          </p:cNvSpPr>
+          <p:nvPr>
+            <p:ph type="hdr" sz="quarter"/>
+          </p:nvPr>
+        </p:nvSpPr>
+        <p:spPr>
+          <a:xfrm>
+            <a:off x="0" y="0"/>
+            <a:ext cx="2971800" cy="458788"/>
+          </a:xfrm>
+          <a:prstGeom prst="rect">
+            <a:avLst/>
+          </a:prstGeom>
+        </p:spPr>
+        <p:txBody>
+          <a:bodyPr vert="horz" lIns="91440" tIns="45720" rIns="91440" bIns="45720" rtlCol="0"/>
+          <a:lstStyle>
+            <a:lvl1pPr algn="l">
+              <a:defRPr sz="1200"/>
+            </a:lvl1pPr>
+          </a:lstStyle>
+          <a:p>
+            <a:endParaRPr lang="en-US"/>
+          </a:p>
+        </p:txBody>
+      </p:sp>
+      <p:sp>
+        <p:nvSpPr>
+          <p:cNvPr id="3" name="Date Placeholder 2"/>
+          <p:cNvSpPr>
+            <a:spLocks noGrp="1"/>
+          </p:cNvSpPr>
+          <p:nvPr>
+            <p:ph type="dt" idx="1"/>
+          </p:nvPr>
+        </p:nvSpPr>
+        <p:spPr>
+          <a:xfrm>
+            <a:off x="3884613" y="0"/>
+            <a:ext cx="2971800" cy="458788"/>
+          </a:xfrm>
+          <a:prstGeom prst="rect">
+            <a:avLst/>
+          </a:prstGeom>
+        </p:spPr>
+        <p:txBody>
+          <a:bodyPr vert="horz" lIns="91440" tIns="45720" rIns="91440" bIns="45720" rtlCol="0"/>
+          <a:lstStyle>
+            <a:lvl1pPr algn="r">
+              <a:defRPr sz="1200"/>
+            </a:lvl1pPr>
+          </a:lstStyle>
+          <a:p>
+            <a:fld id="{B962F5BD-8652-42DB-944F-88B4D2CEF8DC}" type="datetimeFigureOut">
+              <a:rPr lang="en-US" smtClean="0"/>
+              <a:t>4/22/2026</a:t>
+            </a:fld>
+            <a:endParaRPr lang="en-US"/>
+          </a:p>
+        </p:txBody>
+      </p:sp>
+      <p:sp>
+        <p:nvSpPr>
+          <p:cNvPr id="4" name="Slide Image Placeholder 3"/>
+          <p:cNvSpPr>
+            <a:spLocks noGrp="1" noRot="1" noChangeAspect="1"/>
+          </p:cNvSpPr>
+          <p:nvPr>
+            <p:ph type="sldImg" idx="2"/>
+          </p:nvPr>
+        </p:nvSpPr>
+        <p:spPr>
+          <a:xfrm>
+            <a:off x="685800" y="1143000"/>
+            <a:ext cx="5486400" cy="3086100"/>
+          </a:xfrm>
+          <a:prstGeom prst="rect">
+            <a:avLst/>
+          </a:prstGeom>
+          <a:noFill/>
+          <a:ln w="12700">
+            <a:solidFill>
+              <a:prstClr val="black"/>
+            </a:solidFill>
+          </a:ln>
+        </p:spPr>
+        <p:txBody>
+          <a:bodyPr vert="horz" lIns="91440" tIns="45720" rIns="91440" bIns="45720" rtlCol="0" anchor="ctr"/>
+          <a:lstStyle/>
+          <a:p>
+            <a:endParaRPr lang="en-US"/>
+          </a:p>
+        </p:txBody>
+      </p:sp>
+      <p:sp>
+        <p:nvSpPr>
+          <p:cNvPr id="5" name="Notes Placeholder 4"/>
+          <p:cNvSpPr>
+            <a:spLocks noGrp="1"/>
+          </p:cNvSpPr>
+          <p:nvPr>
+            <p:ph type="body" sz="quarter" idx="3"/>
+          </p:nvPr>
+        </p:nvSpPr>
+        <p:spPr>
+          <a:xfrm>
+            <a:off x="685800" y="4400550"/>
+            <a:ext cx="5486400" cy="3600450"/>
+          </a:xfrm>
+          <a:prstGeom prst="rect">
+            <a:avLst/>
+          </a:prstGeom>
+        </p:spPr>
+        <p:txBody>
+          <a:bodyPr vert="horz" lIns="91440" tIns="45720" rIns="91440" bIns="45720" rtlCol="0"/>
+          <a:lstStyle/>
+          <a:p>
+            <a:pPr lvl="0"/>
+            <a:r>
+              <a:rPr lang="en-US"/>
+              <a:t>Click to edit Master text styles</a:t>
+            </a:r>
+          </a:p>
+          <a:p>
+            <a:pPr lvl="1"/>
+            <a:r>
+              <a:rPr lang="en-US"/>
+              <a:t>Second level</a:t>
+            </a:r>
+          </a:p>
+          <a:p>
+            <a:pPr lvl="2"/>
+            <a:r>
+              <a:rPr lang="en-US"/>
+              <a:t>Third level</a:t>
+            </a:r>
+          </a:p>
+          <a:p>
+            <a:pPr lvl="3"/>
+            <a:r>
+              <a:rPr lang="en-US"/>
+              <a:t>Fourth level</a:t>
+            </a:r>
+          </a:p>
+          <a:p>
+            <a:pPr lvl="4"/>
+            <a:r>
+              <a:rPr lang="en-US"/>
+              <a:t>Fifth level</a:t>
+            </a:r>
+          </a:p>
+        </p:txBody>
+      </p:sp>
+      <p:sp>
+        <p:nvSpPr>
+          <p:cNvPr id="6" name="Footer Placeholder 5"/>
+          <p:cNvSpPr>
+            <a:spLocks noGrp="1"/>
+          </p:cNvSpPr>
+          <p:nvPr>
+            <p:ph type="ftr" sz="quarter" idx="4"/>
+          </p:nvPr>
+        </p:nvSpPr>
+        <p:spPr>
+          <a:xfrm>
+            <a:off x="0" y="8685213"/>
+            <a:ext cx="2971800" cy="458787"/>
+          </a:xfrm>
+          <a:prstGeom prst="rect">
+            <a:avLst/>
+          </a:prstGeom>
+        </p:spPr>
+        <p:txBody>
+          <a:bodyPr vert="horz" lIns="91440" tIns="45720" rIns="91440" bIns="45720" rtlCol="0" anchor="b"/>
+          <a:lstStyle>
+            <a:lvl1pPr algn="l">
+              <a:defRPr sz="1200"/>
+            </a:lvl1pPr>
+          </a:lstStyle>
+          <a:p>
+            <a:endParaRPr lang="en-US"/>
+          </a:p>
+        </p:txBody>
+      </p:sp>
+      <p:sp>
+        <p:nvSpPr>
+          <p:cNvPr id="7" name="Slide Number Placeholder 6"/>
+          <p:cNvSpPr>
+            <a:spLocks noGrp="1"/>
+          </p:cNvSpPr>
+          <p:nvPr>
+            <p:ph type="sldNum" sz="quarter" idx="5"/>
+          </p:nvPr>
+        </p:nvSpPr>
+        <p:spPr>
+          <a:xfrm>
+            <a:off x="3884613" y="8685213"/>
+            <a:ext cx="2971800" cy="458787"/>
+          </a:xfrm>
+          <a:prstGeom prst="rect">
+            <a:avLst/>
+          </a:prstGeom>
+        </p:spPr>
+        <p:txBody>
+          <a:bodyPr vert="horz" lIns="91440" tIns="45720" rIns="91440" bIns="45720" rtlCol="0" anchor="b"/>
+          <a:lstStyle>
+            <a:lvl1pPr algn="r">
+              <a:defRPr sz="1200"/>
+            </a:lvl1pPr>
+          </a:lstStyle>
+          <a:p>
+            <a:fld id="{FBE5FEBB-3B5B-43D0-B112-BF03AF571BB8}" type="slidenum">
+              <a:rPr lang="en-US" smtClean="0"/>
+              <a:t>‹#›</a:t>
+            </a:fld>
+            <a:endParaRPr lang="en-US"/>
+          </a:p>
+        </p:txBody>
+      </p:sp>
+    </p:spTree>
+    <p:extLst>
+      <p:ext uri="{BB962C8B-B14F-4D97-AF65-F5344CB8AC3E}">
+        <p14:creationId xmlns:p14="http://schemas.microsoft.com/office/powerpoint/2010/main" val="1063073055"/>
+      </p:ext>
+    </p:extLst>
+  </p:cSld>
+  <p:clrMap bg1="lt1" tx1="dk1" bg2="lt2" tx2="dk2" accent1="accent1" accent2="accent2" accent3="accent3" accent4="accent4" accent5="accent5" accent6="accent6" hlink="hlink" folHlink="folHlink"/>
+  <p:notesStyle>
+    <a:lvl1pPr marL="0" algn="l" defTabSz="914400" rtl="0" eaLnBrk="1" latinLnBrk="0" hangingPunct="1">
+      <a:defRPr sz="1200" kern="1200">
+        <a:solidFill>
+          <a:schemeClr val="tx1"/>
+        </a:solidFill>
+        <a:latin typeface="+mn-lt"/>
+        <a:ea typeface="+mn-ea"/>
+        <a:cs typeface="+mn-cs"/>
+      </a:defRPr>
+    </a:lvl1pPr>
+    <a:lvl2pPr marL="457200" algn="l" defTabSz="914400" rtl="0" eaLnBrk="1" latinLnBrk="0" hangingPunct="1">
+      <a:defRPr sz="1200" kern="1200">
+        <a:solidFill>
+          <a:schemeClr val="tx1"/>
+        </a:solidFill>
+        <a:latin typeface="+mn-lt"/>
+        <a:ea typeface="+mn-ea"/>
+        <a:cs typeface="+mn-cs"/>
+      </a:defRPr>
+    </a:lvl2pPr>
+    <a:lvl3pPr marL="914400" algn="l" defTabSz="914400" rtl="0" eaLnBrk="1" latinLnBrk="0" hangingPunct="1">
+      <a:defRPr sz="1200" kern="1200">
+        <a:solidFill>
+          <a:schemeClr val="tx1"/>
+        </a:solidFill>
+        <a:latin typeface="+mn-lt"/>
+        <a:ea typeface="+mn-ea"/>
+        <a:cs typeface="+mn-cs"/>
+      </a:defRPr>
+    </a:lvl3pPr>
+    <a:lvl4pPr marL="1371600" algn="l" defTabSz="914400" rtl="0" eaLnBrk="1" latinLnBrk="0" hangingPunct="1">
+      <a:defRPr sz="1200" kern="1200">
+        <a:solidFill>
+          <a:schemeClr val="tx1"/>
+        </a:solidFill>
+        <a:latin typeface="+mn-lt"/>
+        <a:ea typeface="+mn-ea"/>
+        <a:cs typeface="+mn-cs"/>
+      </a:defRPr>
+    </a:lvl4pPr>
+    <a:lvl5pPr marL="1828800" algn="l" defTabSz="914400" rtl="0" eaLnBrk="1" latinLnBrk="0" hangingPunct="1">
+      <a:defRPr sz="1200" kern="1200">
+        <a:solidFill>
+          <a:schemeClr val="tx1"/>
+        </a:solidFill>
+        <a:latin typeface="+mn-lt"/>
+        <a:ea typeface="+mn-ea"/>
+        <a:cs typeface="+mn-cs"/>
+      </a:defRPr>
+    </a:lvl5pPr>
+    <a:lvl6pPr marL="2286000" algn="l" defTabSz="914400" rtl="0" eaLnBrk="1" latinLnBrk="0" hangingPunct="1">
+      <a:defRPr sz="1200" kern="1200">
+        <a:solidFill>
+          <a:schemeClr val="tx1"/>
+        </a:solidFill>
+        <a:latin typeface="+mn-lt"/>
+        <a:ea typeface="+mn-ea"/>
+        <a:cs typeface="+mn-cs"/>
+      </a:defRPr>
+    </a:lvl6pPr>
+    <a:lvl7pPr marL="2743200" algn="l" defTabSz="914400" rtl="0" eaLnBrk="1" latinLnBrk="0" hangingPunct="1">
+      <a:defRPr sz="1200" kern="1200">
+        <a:solidFill>
+          <a:schemeClr val="tx1"/>
+        </a:solidFill>
+        <a:latin typeface="+mn-lt"/>
+        <a:ea typeface="+mn-ea"/>
+        <a:cs typeface="+mn-cs"/>
+      </a:defRPr>
+    </a:lvl7pPr>
+    <a:lvl8pPr marL="3200400" algn="l" defTabSz="914400" rtl="0" eaLnBrk="1" latinLnBrk="0" hangingPunct="1">
+      <a:defRPr sz="1200" kern="1200">
+        <a:solidFill>
+          <a:schemeClr val="tx1"/>
+        </a:solidFill>
+        <a:latin typeface="+mn-lt"/>
+        <a:ea typeface="+mn-ea"/>
+        <a:cs typeface="+mn-cs"/>
+      </a:defRPr>
+    </a:lvl8pPr>
+    <a:lvl9pPr marL="3657600" algn="l" defTabSz="914400" rtl="0" eaLnBrk="1" latinLnBrk="0" hangingPunct="1">
+      <a:defRPr sz="1200" kern="1200">
+        <a:solidFill>
+          <a:schemeClr val="tx1"/>
+        </a:solidFill>
+        <a:latin typeface="+mn-lt"/>
+        <a:ea typeface="+mn-ea"/>
+        <a:cs typeface="+mn-cs"/>
+      </a:defRPr>
+    </a:lvl9pPr>
+  </p:notesStyle>
+</p:notesMaster>
+</file>
+
+<file path=ppt/notesSlides/notesSlide1.xml><?xml version="1.0" encoding="utf-8"?>
+<p:notes xmlns:a="http://schemas.openxmlformats.org/drawingml/2006/main" xmlns:r="http://schemas.openxmlformats.org/officeDocument/2006/relationships" xmlns:p="http://schemas.openxmlformats.org/presentationml/2006/main">
+  <p:cSld>
+    <p:spTree>
+      <p:nvGrpSpPr>
+        <p:cNvPr id="1" name=""/>
+        <p:cNvGrpSpPr/>
+        <p:nvPr/>
+      </p:nvGrpSpPr>
+      <p:grpSpPr>
+        <a:xfrm>
+          <a:off x="0" y="0"/>
+          <a:ext cx="0" cy="0"/>
+          <a:chOff x="0" y="0"/>
+          <a:chExt cx="0" cy="0"/>
+        </a:xfrm>
+      </p:grpSpPr>
+      <p:sp>
+        <p:nvSpPr>
+          <p:cNvPr id="2" name="Slide Image Placeholder 1"/>
+          <p:cNvSpPr>
+            <a:spLocks noGrp="1" noRot="1" noChangeAspect="1"/>
+          </p:cNvSpPr>
+          <p:nvPr>
+            <p:ph type="sldImg"/>
+          </p:nvPr>
+        </p:nvSpPr>
+        <p:spPr/>
+      </p:sp>
+      <p:sp>
+        <p:nvSpPr>
+          <p:cNvPr id="3" name="Notes Placeholder 2"/>
+          <p:cNvSpPr>
+            <a:spLocks noGrp="1"/>
+          </p:cNvSpPr>
+          <p:nvPr>
+            <p:ph type="body" idx="1"/>
+          </p:nvPr>
+        </p:nvSpPr>
+        <p:spPr/>
+        <p:txBody>
+          <a:bodyPr/>
+          <a:lstStyle/>
+          <a:p>
+            <a:pPr marL="0" marR="0" lvl="0" indent="0" algn="l" defTabSz="914400" rtl="0" eaLnBrk="1" fontAlgn="auto" latinLnBrk="0" hangingPunct="1">
+              <a:lnSpc>
+                <a:spcPct val="100000"/>
+              </a:lnSpc>
+              <a:spcBef>
+                <a:spcPts val="0"/>
+              </a:spcBef>
+              <a:spcAft>
+                <a:spcPts val="0"/>
+              </a:spcAft>
+              <a:buClrTx/>
+              <a:buSzTx/>
+              <a:buFontTx/>
+              <a:buNone/>
+              <a:tabLst/>
+              <a:defRPr/>
+            </a:pPr>
+            <a:r>
+              <a:rPr lang="en-US" dirty="0">
+                <a:effectLst/>
+              </a:rPr>
+              <a:t>This study focuses on understanding which baseline factors predict stroke within 10 years, how those predictors differ by sex, and how risk varies across common clinical profiles. I also examined how blood pressure and diabetes change over time to consider whether time‑varying models might be needed.</a:t>
+            </a:r>
+            <a:endParaRPr lang="en-US" dirty="0"/>
+          </a:p>
+          <a:p>
+            <a:endParaRPr lang="en-US" dirty="0"/>
+          </a:p>
+        </p:txBody>
+      </p:sp>
+      <p:sp>
+        <p:nvSpPr>
+          <p:cNvPr id="4" name="Slide Number Placeholder 3"/>
+          <p:cNvSpPr>
+            <a:spLocks noGrp="1"/>
+          </p:cNvSpPr>
+          <p:nvPr>
+            <p:ph type="sldNum" sz="quarter" idx="5"/>
+          </p:nvPr>
+        </p:nvSpPr>
+        <p:spPr/>
+        <p:txBody>
+          <a:bodyPr/>
+          <a:lstStyle/>
+          <a:p>
+            <a:fld id="{FBE5FEBB-3B5B-43D0-B112-BF03AF571BB8}" type="slidenum">
+              <a:rPr lang="en-US" smtClean="0"/>
+              <a:t>2</a:t>
+            </a:fld>
+            <a:endParaRPr lang="en-US"/>
+          </a:p>
+        </p:txBody>
+      </p:sp>
+    </p:spTree>
+    <p:extLst>
+      <p:ext uri="{BB962C8B-B14F-4D97-AF65-F5344CB8AC3E}">
+        <p14:creationId xmlns:p14="http://schemas.microsoft.com/office/powerpoint/2010/main" val="572660875"/>
+      </p:ext>
+    </p:extLst>
+  </p:cSld>
+  <p:clrMapOvr>
+    <a:masterClrMapping/>
+  </p:clrMapOvr>
+</p:notes>
+</file>
+
+<file path=ppt/notesSlides/notesSlide2.xml><?xml version="1.0" encoding="utf-8"?>
+<p:notes xmlns:a="http://schemas.openxmlformats.org/drawingml/2006/main" xmlns:r="http://schemas.openxmlformats.org/officeDocument/2006/relationships" xmlns:p="http://schemas.openxmlformats.org/presentationml/2006/main">
+  <p:cSld>
+    <p:spTree>
+      <p:nvGrpSpPr>
+        <p:cNvPr id="1" name=""/>
+        <p:cNvGrpSpPr/>
+        <p:nvPr/>
+      </p:nvGrpSpPr>
+      <p:grpSpPr>
+        <a:xfrm>
+          <a:off x="0" y="0"/>
+          <a:ext cx="0" cy="0"/>
+          <a:chOff x="0" y="0"/>
+          <a:chExt cx="0" cy="0"/>
+        </a:xfrm>
+      </p:grpSpPr>
+      <p:sp>
+        <p:nvSpPr>
+          <p:cNvPr id="2" name="Slide Image Placeholder 1"/>
+          <p:cNvSpPr>
+            <a:spLocks noGrp="1" noRot="1" noChangeAspect="1"/>
+          </p:cNvSpPr>
+          <p:nvPr>
+            <p:ph type="sldImg"/>
+          </p:nvPr>
+        </p:nvSpPr>
+        <p:spPr/>
+      </p:sp>
+      <p:sp>
+        <p:nvSpPr>
+          <p:cNvPr id="3" name="Notes Placeholder 2"/>
+          <p:cNvSpPr>
+            <a:spLocks noGrp="1"/>
+          </p:cNvSpPr>
+          <p:nvPr>
+            <p:ph type="body" idx="1"/>
+          </p:nvPr>
+        </p:nvSpPr>
+        <p:spPr/>
+        <p:txBody>
+          <a:bodyPr/>
+          <a:lstStyle/>
+          <a:p>
+            <a:r>
+              <a:rPr lang="en-US" dirty="0"/>
+              <a:t>This table shows the baseline characteristics. The KM curves highlight that diabetes and high systolic BP have the strongest unadjusted associations with stroke‑free survival.</a:t>
+            </a:r>
+          </a:p>
+        </p:txBody>
+      </p:sp>
+      <p:sp>
+        <p:nvSpPr>
+          <p:cNvPr id="4" name="Slide Number Placeholder 3"/>
+          <p:cNvSpPr>
+            <a:spLocks noGrp="1"/>
+          </p:cNvSpPr>
+          <p:nvPr>
+            <p:ph type="sldNum" sz="quarter" idx="5"/>
+          </p:nvPr>
+        </p:nvSpPr>
+        <p:spPr/>
+        <p:txBody>
+          <a:bodyPr/>
+          <a:lstStyle/>
+          <a:p>
+            <a:fld id="{FBE5FEBB-3B5B-43D0-B112-BF03AF571BB8}" type="slidenum">
+              <a:rPr lang="en-US" smtClean="0"/>
+              <a:t>3</a:t>
+            </a:fld>
+            <a:endParaRPr lang="en-US"/>
+          </a:p>
+        </p:txBody>
+      </p:sp>
+    </p:spTree>
+    <p:extLst>
+      <p:ext uri="{BB962C8B-B14F-4D97-AF65-F5344CB8AC3E}">
+        <p14:creationId xmlns:p14="http://schemas.microsoft.com/office/powerpoint/2010/main" val="1566223534"/>
+      </p:ext>
+    </p:extLst>
+  </p:cSld>
+  <p:clrMapOvr>
+    <a:masterClrMapping/>
+  </p:clrMapOvr>
+</p:notes>
+</file>
+
+<file path=ppt/notesSlides/notesSlide3.xml><?xml version="1.0" encoding="utf-8"?>
+<p:notes xmlns:a="http://schemas.openxmlformats.org/drawingml/2006/main" xmlns:r="http://schemas.openxmlformats.org/officeDocument/2006/relationships" xmlns:p="http://schemas.openxmlformats.org/presentationml/2006/main">
+  <p:cSld>
+    <p:spTree>
+      <p:nvGrpSpPr>
+        <p:cNvPr id="1" name=""/>
+        <p:cNvGrpSpPr/>
+        <p:nvPr/>
+      </p:nvGrpSpPr>
+      <p:grpSpPr>
+        <a:xfrm>
+          <a:off x="0" y="0"/>
+          <a:ext cx="0" cy="0"/>
+          <a:chOff x="0" y="0"/>
+          <a:chExt cx="0" cy="0"/>
+        </a:xfrm>
+      </p:grpSpPr>
+      <p:sp>
+        <p:nvSpPr>
+          <p:cNvPr id="2" name="Slide Image Placeholder 1"/>
+          <p:cNvSpPr>
+            <a:spLocks noGrp="1" noRot="1" noChangeAspect="1"/>
+          </p:cNvSpPr>
+          <p:nvPr>
+            <p:ph type="sldImg"/>
+          </p:nvPr>
+        </p:nvSpPr>
+        <p:spPr/>
+      </p:sp>
+      <p:sp>
+        <p:nvSpPr>
+          <p:cNvPr id="3" name="Notes Placeholder 2"/>
+          <p:cNvSpPr>
+            <a:spLocks noGrp="1"/>
+          </p:cNvSpPr>
+          <p:nvPr>
+            <p:ph type="body" idx="1"/>
+          </p:nvPr>
+        </p:nvSpPr>
+        <p:spPr/>
+        <p:txBody>
+          <a:bodyPr/>
+          <a:lstStyle/>
+          <a:p>
+            <a:endParaRPr lang="en-US" dirty="0"/>
+          </a:p>
+        </p:txBody>
+      </p:sp>
+      <p:sp>
+        <p:nvSpPr>
+          <p:cNvPr id="4" name="Slide Number Placeholder 3"/>
+          <p:cNvSpPr>
+            <a:spLocks noGrp="1"/>
+          </p:cNvSpPr>
+          <p:nvPr>
+            <p:ph type="sldNum" sz="quarter" idx="5"/>
+          </p:nvPr>
+        </p:nvSpPr>
+        <p:spPr/>
+        <p:txBody>
+          <a:bodyPr/>
+          <a:lstStyle/>
+          <a:p>
+            <a:fld id="{FBE5FEBB-3B5B-43D0-B112-BF03AF571BB8}" type="slidenum">
+              <a:rPr lang="en-US" smtClean="0"/>
+              <a:t>6</a:t>
+            </a:fld>
+            <a:endParaRPr lang="en-US"/>
+          </a:p>
+        </p:txBody>
+      </p:sp>
+    </p:spTree>
+    <p:extLst>
+      <p:ext uri="{BB962C8B-B14F-4D97-AF65-F5344CB8AC3E}">
+        <p14:creationId xmlns:p14="http://schemas.microsoft.com/office/powerpoint/2010/main" val="263600307"/>
+      </p:ext>
+    </p:extLst>
+  </p:cSld>
+  <p:clrMapOvr>
+    <a:masterClrMapping/>
+  </p:clrMapOvr>
+</p:notes>
+</file>
+
+<file path=ppt/notesSlides/notesSlide4.xml><?xml version="1.0" encoding="utf-8"?>
+<p:notes xmlns:a="http://schemas.openxmlformats.org/drawingml/2006/main" xmlns:r="http://schemas.openxmlformats.org/officeDocument/2006/relationships" xmlns:p="http://schemas.openxmlformats.org/presentationml/2006/main">
+  <p:cSld>
+    <p:spTree>
+      <p:nvGrpSpPr>
+        <p:cNvPr id="1" name=""/>
+        <p:cNvGrpSpPr/>
+        <p:nvPr/>
+      </p:nvGrpSpPr>
+      <p:grpSpPr>
+        <a:xfrm>
+          <a:off x="0" y="0"/>
+          <a:ext cx="0" cy="0"/>
+          <a:chOff x="0" y="0"/>
+          <a:chExt cx="0" cy="0"/>
+        </a:xfrm>
+      </p:grpSpPr>
+      <p:sp>
+        <p:nvSpPr>
+          <p:cNvPr id="2" name="Slide Image Placeholder 1"/>
+          <p:cNvSpPr>
+            <a:spLocks noGrp="1" noRot="1" noChangeAspect="1"/>
+          </p:cNvSpPr>
+          <p:nvPr>
+            <p:ph type="sldImg"/>
+          </p:nvPr>
+        </p:nvSpPr>
+        <p:spPr/>
+      </p:sp>
+      <p:sp>
+        <p:nvSpPr>
+          <p:cNvPr id="3" name="Notes Placeholder 2"/>
+          <p:cNvSpPr>
+            <a:spLocks noGrp="1"/>
+          </p:cNvSpPr>
+          <p:nvPr>
+            <p:ph type="body" idx="1"/>
+          </p:nvPr>
+        </p:nvSpPr>
+        <p:spPr/>
+        <p:txBody>
+          <a:bodyPr/>
+          <a:lstStyle/>
+          <a:p>
+            <a:r>
+              <a:rPr lang="en-US" dirty="0"/>
+              <a:t>BP and diabetes change meaningfully over time, suggesting that future work could benefit from time‑varying models. Still, baseline‑only models remain appropriate for 10‑year risk prediction.</a:t>
+            </a:r>
+          </a:p>
+        </p:txBody>
+      </p:sp>
+      <p:sp>
+        <p:nvSpPr>
+          <p:cNvPr id="4" name="Slide Number Placeholder 3"/>
+          <p:cNvSpPr>
+            <a:spLocks noGrp="1"/>
+          </p:cNvSpPr>
+          <p:nvPr>
+            <p:ph type="sldNum" sz="quarter" idx="5"/>
+          </p:nvPr>
+        </p:nvSpPr>
+        <p:spPr/>
+        <p:txBody>
+          <a:bodyPr/>
+          <a:lstStyle/>
+          <a:p>
+            <a:fld id="{FBE5FEBB-3B5B-43D0-B112-BF03AF571BB8}" type="slidenum">
+              <a:rPr lang="en-US" smtClean="0"/>
+              <a:t>7</a:t>
+            </a:fld>
+            <a:endParaRPr lang="en-US"/>
+          </a:p>
+        </p:txBody>
+      </p:sp>
+    </p:spTree>
+    <p:extLst>
+      <p:ext uri="{BB962C8B-B14F-4D97-AF65-F5344CB8AC3E}">
+        <p14:creationId xmlns:p14="http://schemas.microsoft.com/office/powerpoint/2010/main" val="784861275"/>
+      </p:ext>
+    </p:extLst>
+  </p:cSld>
+  <p:clrMapOvr>
+    <a:masterClrMapping/>
+  </p:clrMapOvr>
+</p:notes>
 </file>
 
 <file path=ppt/slideLayouts/slideLayout1.xml><?xml version="1.0" encoding="utf-8"?>
@@ -3729,12 +4590,83 @@
         </p:nvSpPr>
         <p:spPr/>
         <p:txBody>
-          <a:bodyPr/>
+          <a:bodyPr>
+            <a:normAutofit fontScale="92500"/>
+          </a:bodyPr>
           <a:lstStyle/>
           <a:p>
             <a:r>
               <a:rPr lang="en-US" dirty="0"/>
-              <a:t>The primary goal is to identify which baseline risk factors predict time to first stroke within 10 years, analyzed separately for males and females. A secondary aim is to estimate 10 year stroke probabilities for several clinically relevant risk profiles. Because risk factors were measured at three exam periods, an additional aim is to describe how systolic blood pressure and diabetes status change over time and to discuss how such changes might influence analyses that rely only on baseline values.</a:t>
+              <a:t>What baseline risk factors predict time to first stroke within 10 years? </a:t>
+            </a:r>
+          </a:p>
+          <a:p>
+            <a:pPr lvl="1"/>
+            <a:r>
+              <a:rPr lang="en-US" dirty="0"/>
+              <a:t>Separate for males and females</a:t>
+            </a:r>
+          </a:p>
+          <a:p>
+            <a:r>
+              <a:rPr lang="en-US" dirty="0"/>
+              <a:t>What are the 10 year stroke probabilities for clinically relevant risk profiles? </a:t>
+            </a:r>
+          </a:p>
+          <a:p>
+            <a:pPr marL="971550" lvl="1" indent="-514350">
+              <a:buFont typeface="+mj-lt"/>
+              <a:buAutoNum type="arabicPeriod"/>
+            </a:pPr>
+            <a:r>
+              <a:rPr lang="en-US" dirty="0"/>
+              <a:t>No baseline risk factors,</a:t>
+            </a:r>
+          </a:p>
+          <a:p>
+            <a:pPr marL="971550" lvl="1" indent="-514350">
+              <a:buFont typeface="+mj-lt"/>
+              <a:buAutoNum type="arabicPeriod"/>
+            </a:pPr>
+            <a:r>
+              <a:rPr lang="en-US" dirty="0"/>
+              <a:t>High systolic blood pressure (≥ 160 mmHg),</a:t>
+            </a:r>
+          </a:p>
+          <a:p>
+            <a:pPr marL="971550" lvl="1" indent="-514350">
+              <a:buFont typeface="+mj-lt"/>
+              <a:buAutoNum type="arabicPeriod"/>
+            </a:pPr>
+            <a:r>
+              <a:rPr lang="en-US" dirty="0"/>
+              <a:t>Diabetes, </a:t>
+            </a:r>
+          </a:p>
+          <a:p>
+            <a:pPr marL="971550" lvl="1" indent="-514350">
+              <a:buFont typeface="+mj-lt"/>
+              <a:buAutoNum type="arabicPeriod"/>
+            </a:pPr>
+            <a:r>
+              <a:rPr lang="en-US" dirty="0"/>
+              <a:t>Both high systolic blood pressure and diabetes,</a:t>
+            </a:r>
+          </a:p>
+          <a:p>
+            <a:pPr marL="971550" lvl="1" indent="-514350">
+              <a:buFont typeface="+mj-lt"/>
+              <a:buAutoNum type="arabicPeriod"/>
+            </a:pPr>
+            <a:r>
+              <a:rPr lang="en-US" dirty="0"/>
+              <a:t>One additional profile chosen based on model results (current smoker).</a:t>
+            </a:r>
+          </a:p>
+          <a:p>
+            <a:r>
+              <a:rPr lang="en-US" dirty="0"/>
+              <a:t>Describe how systolic blood pressure and diabetes change over time</a:t>
             </a:r>
           </a:p>
         </p:txBody>
@@ -3799,10 +4731,10 @@
       </p:sp>
       <p:pic>
         <p:nvPicPr>
-          <p:cNvPr id="5" name="Content Placeholder 4">
-            <a:extLst>
-              <a:ext uri="{FF2B5EF4-FFF2-40B4-BE49-F238E27FC236}">
-                <a16:creationId xmlns:a16="http://schemas.microsoft.com/office/drawing/2014/main" id="{1AB4BA69-8627-7EC6-DC70-5292E62B3E0E}"/>
+          <p:cNvPr id="7" name="Content Placeholder 6">
+            <a:extLst>
+              <a:ext uri="{FF2B5EF4-FFF2-40B4-BE49-F238E27FC236}">
+                <a16:creationId xmlns:a16="http://schemas.microsoft.com/office/drawing/2014/main" id="{712B5571-4803-A3FF-8712-ABCC7CD2165B}"/>
               </a:ext>
             </a:extLst>
           </p:cNvPr>
@@ -3814,7 +4746,7 @@
           </p:nvPr>
         </p:nvPicPr>
         <p:blipFill>
-          <a:blip r:embed="rId2">
+          <a:blip r:embed="rId3">
             <a:extLst>
               <a:ext uri="{28A0092B-C50C-407E-A947-70E740481C1C}">
                 <a14:useLocalDpi xmlns:a14="http://schemas.microsoft.com/office/drawing/2010/main" val="0"/>
@@ -3827,8 +4759,8 @@
         </p:blipFill>
         <p:spPr>
           <a:xfrm>
-            <a:off x="631722" y="1424837"/>
-            <a:ext cx="4222205" cy="5433163"/>
+            <a:off x="838200" y="1292942"/>
+            <a:ext cx="5565058" cy="5565058"/>
           </a:xfrm>
           <a:prstGeom prst="rect">
             <a:avLst/>
@@ -3837,10 +4769,10 @@
       </p:pic>
       <p:pic>
         <p:nvPicPr>
-          <p:cNvPr id="8" name="Picture 7">
-            <a:extLst>
-              <a:ext uri="{FF2B5EF4-FFF2-40B4-BE49-F238E27FC236}">
-                <a16:creationId xmlns:a16="http://schemas.microsoft.com/office/drawing/2014/main" id="{47801B78-452A-73C3-F3D3-56F8240FD9A8}"/>
+          <p:cNvPr id="10" name="Picture 9">
+            <a:extLst>
+              <a:ext uri="{FF2B5EF4-FFF2-40B4-BE49-F238E27FC236}">
+                <a16:creationId xmlns:a16="http://schemas.microsoft.com/office/drawing/2014/main" id="{18A96AB4-E7EA-E1DF-E2E8-042D9D56D4AD}"/>
               </a:ext>
             </a:extLst>
           </p:cNvPr>
@@ -3850,27 +4782,236 @@
           <p:nvPr/>
         </p:nvPicPr>
         <p:blipFill>
-          <a:blip r:embed="rId3">
+          <a:blip r:embed="rId4">
             <a:extLst>
               <a:ext uri="{28A0092B-C50C-407E-A947-70E740481C1C}">
                 <a14:useLocalDpi xmlns:a14="http://schemas.microsoft.com/office/drawing/2010/main" val="0"/>
               </a:ext>
             </a:extLst>
           </a:blip>
+          <a:srcRect r="15002"/>
           <a:stretch>
             <a:fillRect/>
           </a:stretch>
         </p:blipFill>
         <p:spPr>
           <a:xfrm>
-            <a:off x="5333043" y="189569"/>
-            <a:ext cx="6858957" cy="6668431"/>
+            <a:off x="7197213" y="0"/>
+            <a:ext cx="4994787" cy="6859080"/>
           </a:xfrm>
           <a:prstGeom prst="rect">
             <a:avLst/>
           </a:prstGeom>
         </p:spPr>
       </p:pic>
+      <p:sp>
+        <p:nvSpPr>
+          <p:cNvPr id="13" name="Rectangle 12">
+            <a:extLst>
+              <a:ext uri="{FF2B5EF4-FFF2-40B4-BE49-F238E27FC236}">
+                <a16:creationId xmlns:a16="http://schemas.microsoft.com/office/drawing/2014/main" id="{A86ACD78-64A8-7975-40F9-91464DD2F39A}"/>
+              </a:ext>
+            </a:extLst>
+          </p:cNvPr>
+          <p:cNvSpPr/>
+          <p:nvPr/>
+        </p:nvSpPr>
+        <p:spPr>
+          <a:xfrm>
+            <a:off x="7285705" y="806245"/>
+            <a:ext cx="324464" cy="167149"/>
+          </a:xfrm>
+          <a:prstGeom prst="rect">
+            <a:avLst/>
+          </a:prstGeom>
+          <a:solidFill>
+            <a:srgbClr val="FFFF00">
+              <a:alpha val="50000"/>
+            </a:srgbClr>
+          </a:solidFill>
+          <a:ln>
+            <a:noFill/>
+          </a:ln>
+        </p:spPr>
+        <p:style>
+          <a:lnRef idx="0">
+            <a:scrgbClr r="0" g="0" b="0"/>
+          </a:lnRef>
+          <a:fillRef idx="0">
+            <a:scrgbClr r="0" g="0" b="0"/>
+          </a:fillRef>
+          <a:effectRef idx="0">
+            <a:scrgbClr r="0" g="0" b="0"/>
+          </a:effectRef>
+          <a:fontRef idx="minor">
+            <a:schemeClr val="lt1"/>
+          </a:fontRef>
+        </p:style>
+        <p:txBody>
+          <a:bodyPr rtlCol="0" anchor="ctr"/>
+          <a:lstStyle/>
+          <a:p>
+            <a:pPr algn="ctr"/>
+            <a:endParaRPr lang="en-US"/>
+          </a:p>
+        </p:txBody>
+      </p:sp>
+      <p:sp>
+        <p:nvSpPr>
+          <p:cNvPr id="14" name="Rectangle 13">
+            <a:extLst>
+              <a:ext uri="{FF2B5EF4-FFF2-40B4-BE49-F238E27FC236}">
+                <a16:creationId xmlns:a16="http://schemas.microsoft.com/office/drawing/2014/main" id="{C6FE9B22-563C-6C9E-5825-F94F79ABC8C6}"/>
+              </a:ext>
+            </a:extLst>
+          </p:cNvPr>
+          <p:cNvSpPr/>
+          <p:nvPr/>
+        </p:nvSpPr>
+        <p:spPr>
+          <a:xfrm>
+            <a:off x="7285705" y="1414514"/>
+            <a:ext cx="786578" cy="167149"/>
+          </a:xfrm>
+          <a:prstGeom prst="rect">
+            <a:avLst/>
+          </a:prstGeom>
+          <a:solidFill>
+            <a:srgbClr val="FFFF00">
+              <a:alpha val="50000"/>
+            </a:srgbClr>
+          </a:solidFill>
+          <a:ln>
+            <a:noFill/>
+          </a:ln>
+        </p:spPr>
+        <p:style>
+          <a:lnRef idx="0">
+            <a:scrgbClr r="0" g="0" b="0"/>
+          </a:lnRef>
+          <a:fillRef idx="0">
+            <a:scrgbClr r="0" g="0" b="0"/>
+          </a:fillRef>
+          <a:effectRef idx="0">
+            <a:scrgbClr r="0" g="0" b="0"/>
+          </a:effectRef>
+          <a:fontRef idx="minor">
+            <a:schemeClr val="lt1"/>
+          </a:fontRef>
+        </p:style>
+        <p:txBody>
+          <a:bodyPr rtlCol="0" anchor="ctr"/>
+          <a:lstStyle/>
+          <a:p>
+            <a:pPr algn="ctr"/>
+            <a:endParaRPr lang="en-US"/>
+          </a:p>
+        </p:txBody>
+      </p:sp>
+      <p:sp>
+        <p:nvSpPr>
+          <p:cNvPr id="15" name="Rectangle 14">
+            <a:extLst>
+              <a:ext uri="{FF2B5EF4-FFF2-40B4-BE49-F238E27FC236}">
+                <a16:creationId xmlns:a16="http://schemas.microsoft.com/office/drawing/2014/main" id="{F2E66094-0716-976F-2AC6-DBE7C1344DD4}"/>
+              </a:ext>
+            </a:extLst>
+          </p:cNvPr>
+          <p:cNvSpPr/>
+          <p:nvPr/>
+        </p:nvSpPr>
+        <p:spPr>
+          <a:xfrm>
+            <a:off x="7285705" y="2092019"/>
+            <a:ext cx="609598" cy="169400"/>
+          </a:xfrm>
+          <a:prstGeom prst="rect">
+            <a:avLst/>
+          </a:prstGeom>
+          <a:solidFill>
+            <a:srgbClr val="FFFF00">
+              <a:alpha val="50000"/>
+            </a:srgbClr>
+          </a:solidFill>
+          <a:ln>
+            <a:noFill/>
+          </a:ln>
+        </p:spPr>
+        <p:style>
+          <a:lnRef idx="0">
+            <a:scrgbClr r="0" g="0" b="0"/>
+          </a:lnRef>
+          <a:fillRef idx="0">
+            <a:scrgbClr r="0" g="0" b="0"/>
+          </a:fillRef>
+          <a:effectRef idx="0">
+            <a:scrgbClr r="0" g="0" b="0"/>
+          </a:effectRef>
+          <a:fontRef idx="minor">
+            <a:schemeClr val="lt1"/>
+          </a:fontRef>
+        </p:style>
+        <p:txBody>
+          <a:bodyPr rtlCol="0" anchor="ctr"/>
+          <a:lstStyle/>
+          <a:p>
+            <a:pPr algn="ctr"/>
+            <a:endParaRPr lang="en-US"/>
+          </a:p>
+        </p:txBody>
+      </p:sp>
+      <p:sp>
+        <p:nvSpPr>
+          <p:cNvPr id="16" name="Rectangle 15">
+            <a:extLst>
+              <a:ext uri="{FF2B5EF4-FFF2-40B4-BE49-F238E27FC236}">
+                <a16:creationId xmlns:a16="http://schemas.microsoft.com/office/drawing/2014/main" id="{630DAEE0-7E66-4F6F-482F-496287E413E3}"/>
+              </a:ext>
+            </a:extLst>
+          </p:cNvPr>
+          <p:cNvSpPr/>
+          <p:nvPr/>
+        </p:nvSpPr>
+        <p:spPr>
+          <a:xfrm>
+            <a:off x="7285704" y="4274344"/>
+            <a:ext cx="1103209" cy="169400"/>
+          </a:xfrm>
+          <a:prstGeom prst="rect">
+            <a:avLst/>
+          </a:prstGeom>
+          <a:solidFill>
+            <a:srgbClr val="FFFF00">
+              <a:alpha val="50000"/>
+            </a:srgbClr>
+          </a:solidFill>
+          <a:ln>
+            <a:noFill/>
+          </a:ln>
+        </p:spPr>
+        <p:style>
+          <a:lnRef idx="0">
+            <a:scrgbClr r="0" g="0" b="0"/>
+          </a:lnRef>
+          <a:fillRef idx="0">
+            <a:scrgbClr r="0" g="0" b="0"/>
+          </a:fillRef>
+          <a:effectRef idx="0">
+            <a:scrgbClr r="0" g="0" b="0"/>
+          </a:effectRef>
+          <a:fontRef idx="minor">
+            <a:schemeClr val="lt1"/>
+          </a:fontRef>
+        </p:style>
+        <p:txBody>
+          <a:bodyPr rtlCol="0" anchor="ctr"/>
+          <a:lstStyle/>
+          <a:p>
+            <a:pPr algn="ctr"/>
+            <a:endParaRPr lang="en-US"/>
+          </a:p>
+        </p:txBody>
+      </p:sp>
     </p:spTree>
     <p:extLst>
       <p:ext uri="{BB962C8B-B14F-4D97-AF65-F5344CB8AC3E}">
@@ -3947,24 +5088,26 @@
         </p:nvSpPr>
         <p:spPr/>
         <p:txBody>
-          <a:bodyPr/>
+          <a:bodyPr>
+            <a:normAutofit lnSpcReduction="10000"/>
+          </a:bodyPr>
           <a:lstStyle/>
           <a:p>
             <a:r>
               <a:rPr lang="en-US" dirty="0"/>
-              <a:t>Data Cleaning</a:t>
+              <a:t>Excluded baseline stroke; created indicator for first stroke within 10 years</a:t>
             </a:r>
           </a:p>
           <a:p>
             <a:r>
               <a:rPr lang="en-US" dirty="0"/>
-              <a:t>Kaplan-Meier Curves and log Rank Tests</a:t>
+              <a:t>Stratified analyses by sex</a:t>
             </a:r>
           </a:p>
           <a:p>
             <a:r>
               <a:rPr lang="en-US" dirty="0"/>
-              <a:t>Backwards selection, matched by sex</a:t>
+              <a:t>Kaplan-Meier curves and log-rank tests for key risk factors</a:t>
             </a:r>
           </a:p>
           <a:p>
@@ -3974,21 +5117,34 @@
             </a:r>
           </a:p>
           <a:p>
+            <a:pPr lvl="1"/>
             <a:r>
               <a:rPr lang="en-US" dirty="0"/>
-              <a:t>Proportional Hazards Assumptions</a:t>
-            </a:r>
-          </a:p>
-          <a:p>
+              <a:t>Age, systolic BP, diabetes included </a:t>
+            </a:r>
+            <a:r>
+              <a:rPr lang="en-US" i="1" dirty="0"/>
+              <a:t>a priori</a:t>
+            </a:r>
+          </a:p>
+          <a:p>
+            <a:pPr lvl="1"/>
             <a:r>
               <a:rPr lang="en-US" dirty="0"/>
-              <a:t>10 Year Predicted Stroke Probabilities</a:t>
-            </a:r>
-          </a:p>
-          <a:p>
+              <a:t>Additional covariates evaluated through backwards selection (AIC)</a:t>
+            </a:r>
+          </a:p>
+          <a:p>
+            <a:pPr lvl="1"/>
             <a:r>
               <a:rPr lang="en-US" dirty="0"/>
-              <a:t>Summarizing Missingness and time varying covariates</a:t>
+              <a:t>Checked proportional hazards assumptions</a:t>
+            </a:r>
+          </a:p>
+          <a:p>
+            <a:r>
+              <a:rPr lang="en-US" dirty="0"/>
+              <a:t>Predicted 10 year stroke-free survival for 5 clinical profiles across ages 40, 50, and 60</a:t>
             </a:r>
           </a:p>
         </p:txBody>
@@ -4051,160 +5207,12 @@
           </a:p>
         </p:txBody>
       </p:sp>
-      <p:sp>
-        <p:nvSpPr>
-          <p:cNvPr id="3" name="Content Placeholder 2">
-            <a:extLst>
-              <a:ext uri="{FF2B5EF4-FFF2-40B4-BE49-F238E27FC236}">
-                <a16:creationId xmlns:a16="http://schemas.microsoft.com/office/drawing/2014/main" id="{1B1F310C-5C01-8B70-EF9F-6053BBDC02C7}"/>
-              </a:ext>
-            </a:extLst>
-          </p:cNvPr>
-          <p:cNvSpPr>
-            <a:spLocks noGrp="1"/>
-          </p:cNvSpPr>
-          <p:nvPr>
-            <p:ph idx="1"/>
-          </p:nvPr>
-        </p:nvSpPr>
-        <p:spPr/>
-        <p:txBody>
-          <a:bodyPr/>
-          <a:lstStyle/>
-          <a:p>
-            <a:endParaRPr lang="en-US"/>
-          </a:p>
-        </p:txBody>
-      </p:sp>
       <p:pic>
         <p:nvPicPr>
-          <p:cNvPr id="5" name="Picture 4">
-            <a:extLst>
-              <a:ext uri="{FF2B5EF4-FFF2-40B4-BE49-F238E27FC236}">
-                <a16:creationId xmlns:a16="http://schemas.microsoft.com/office/drawing/2014/main" id="{21FE7651-357F-F9AF-3D1F-5A5452B8CF3F}"/>
-              </a:ext>
-            </a:extLst>
-          </p:cNvPr>
-          <p:cNvPicPr>
-            <a:picLocks noChangeAspect="1"/>
-          </p:cNvPicPr>
-          <p:nvPr/>
-        </p:nvPicPr>
-        <p:blipFill>
-          <a:blip r:embed="rId2"/>
-          <a:stretch>
-            <a:fillRect/>
-          </a:stretch>
-        </p:blipFill>
-        <p:spPr>
-          <a:xfrm>
-            <a:off x="394529" y="1027906"/>
-            <a:ext cx="8649907" cy="5725324"/>
-          </a:xfrm>
-          <a:prstGeom prst="rect">
-            <a:avLst/>
-          </a:prstGeom>
-        </p:spPr>
-      </p:pic>
-      <p:pic>
-        <p:nvPicPr>
-          <p:cNvPr id="7" name="Picture 6">
-            <a:extLst>
-              <a:ext uri="{FF2B5EF4-FFF2-40B4-BE49-F238E27FC236}">
-                <a16:creationId xmlns:a16="http://schemas.microsoft.com/office/drawing/2014/main" id="{1BAAFCCE-D75E-BE45-22BD-A8126F6244C8}"/>
-              </a:ext>
-            </a:extLst>
-          </p:cNvPr>
-          <p:cNvPicPr>
-            <a:picLocks noChangeAspect="1"/>
-          </p:cNvPicPr>
-          <p:nvPr/>
-        </p:nvPicPr>
-        <p:blipFill>
-          <a:blip r:embed="rId3"/>
-          <a:stretch>
-            <a:fillRect/>
-          </a:stretch>
-        </p:blipFill>
-        <p:spPr>
-          <a:xfrm>
-            <a:off x="3373704" y="1113623"/>
-            <a:ext cx="8649907" cy="5744377"/>
-          </a:xfrm>
-          <a:prstGeom prst="rect">
-            <a:avLst/>
-          </a:prstGeom>
-        </p:spPr>
-      </p:pic>
-    </p:spTree>
-    <p:extLst>
-      <p:ext uri="{BB962C8B-B14F-4D97-AF65-F5344CB8AC3E}">
-        <p14:creationId xmlns:p14="http://schemas.microsoft.com/office/powerpoint/2010/main" val="2512102046"/>
-      </p:ext>
-    </p:extLst>
-  </p:cSld>
-  <p:clrMapOvr>
-    <a:masterClrMapping/>
-  </p:clrMapOvr>
-</p:sld>
-</file>
-
-<file path=ppt/slides/slide6.xml><?xml version="1.0" encoding="utf-8"?>
-<p:sld xmlns:a="http://schemas.openxmlformats.org/drawingml/2006/main" xmlns:r="http://schemas.openxmlformats.org/officeDocument/2006/relationships" xmlns:p="http://schemas.openxmlformats.org/presentationml/2006/main">
-  <p:cSld>
-    <p:spTree>
-      <p:nvGrpSpPr>
-        <p:cNvPr id="1" name=""/>
-        <p:cNvGrpSpPr/>
-        <p:nvPr/>
-      </p:nvGrpSpPr>
-      <p:grpSpPr>
-        <a:xfrm>
-          <a:off x="0" y="0"/>
-          <a:ext cx="0" cy="0"/>
-          <a:chOff x="0" y="0"/>
-          <a:chExt cx="0" cy="0"/>
-        </a:xfrm>
-      </p:grpSpPr>
-      <p:sp>
-        <p:nvSpPr>
-          <p:cNvPr id="2" name="Title 1">
-            <a:extLst>
-              <a:ext uri="{FF2B5EF4-FFF2-40B4-BE49-F238E27FC236}">
-                <a16:creationId xmlns:a16="http://schemas.microsoft.com/office/drawing/2014/main" id="{6AA379F0-2156-E489-D552-D78C999D38FB}"/>
-              </a:ext>
-            </a:extLst>
-          </p:cNvPr>
-          <p:cNvSpPr>
-            <a:spLocks noGrp="1"/>
-          </p:cNvSpPr>
-          <p:nvPr>
-            <p:ph type="title"/>
-          </p:nvPr>
-        </p:nvSpPr>
-        <p:spPr>
-          <a:xfrm>
-            <a:off x="838200" y="365124"/>
-            <a:ext cx="10515600" cy="1325563"/>
-          </a:xfrm>
-        </p:spPr>
-        <p:txBody>
-          <a:bodyPr/>
-          <a:lstStyle/>
-          <a:p>
-            <a:r>
-              <a:rPr lang="en-US" dirty="0"/>
-              <a:t>Results</a:t>
-            </a:r>
-          </a:p>
-        </p:txBody>
-      </p:sp>
-      <p:pic>
-        <p:nvPicPr>
-          <p:cNvPr id="5" name="Content Placeholder 4">
-            <a:extLst>
-              <a:ext uri="{FF2B5EF4-FFF2-40B4-BE49-F238E27FC236}">
-                <a16:creationId xmlns:a16="http://schemas.microsoft.com/office/drawing/2014/main" id="{7C57EA02-2C12-D2AA-1656-C4FD0B992650}"/>
+          <p:cNvPr id="6" name="Content Placeholder 5">
+            <a:extLst>
+              <a:ext uri="{FF2B5EF4-FFF2-40B4-BE49-F238E27FC236}">
+                <a16:creationId xmlns:a16="http://schemas.microsoft.com/office/drawing/2014/main" id="{267B4AE3-B3F3-22AB-D0BE-088D33357BB2}"/>
               </a:ext>
             </a:extLst>
           </p:cNvPr>
@@ -4229,56 +5237,20 @@
         </p:blipFill>
         <p:spPr>
           <a:xfrm>
-            <a:off x="0" y="3526576"/>
-            <a:ext cx="5333043" cy="3327581"/>
+            <a:off x="5335675" y="1675"/>
+            <a:ext cx="6856325" cy="6856325"/>
           </a:xfrm>
           <a:prstGeom prst="rect">
             <a:avLst/>
           </a:prstGeom>
         </p:spPr>
       </p:pic>
-      <p:pic>
-        <p:nvPicPr>
-          <p:cNvPr id="7" name="Picture 6">
-            <a:extLst>
-              <a:ext uri="{FF2B5EF4-FFF2-40B4-BE49-F238E27FC236}">
-                <a16:creationId xmlns:a16="http://schemas.microsoft.com/office/drawing/2014/main" id="{83C40886-D2CA-91DD-DFD1-D67E8C928FC2}"/>
-              </a:ext>
-            </a:extLst>
-          </p:cNvPr>
-          <p:cNvPicPr>
-            <a:picLocks noChangeAspect="1"/>
-          </p:cNvPicPr>
-          <p:nvPr/>
-        </p:nvPicPr>
-        <p:blipFill>
-          <a:blip r:embed="rId3">
-            <a:extLst>
-              <a:ext uri="{28A0092B-C50C-407E-A947-70E740481C1C}">
-                <a14:useLocalDpi xmlns:a14="http://schemas.microsoft.com/office/drawing/2010/main" val="0"/>
-              </a:ext>
-            </a:extLst>
-          </a:blip>
-          <a:stretch>
-            <a:fillRect/>
-          </a:stretch>
-        </p:blipFill>
-        <p:spPr>
-          <a:xfrm>
-            <a:off x="5333043" y="1027906"/>
-            <a:ext cx="6858957" cy="5830114"/>
-          </a:xfrm>
-          <a:prstGeom prst="rect">
-            <a:avLst/>
-          </a:prstGeom>
-        </p:spPr>
-      </p:pic>
       <p:sp>
         <p:nvSpPr>
           <p:cNvPr id="8" name="Content Placeholder 2">
             <a:extLst>
               <a:ext uri="{FF2B5EF4-FFF2-40B4-BE49-F238E27FC236}">
-                <a16:creationId xmlns:a16="http://schemas.microsoft.com/office/drawing/2014/main" id="{396C594F-3E58-EF8A-C4BB-11AA81A1CEAE}"/>
+                <a16:creationId xmlns:a16="http://schemas.microsoft.com/office/drawing/2014/main" id="{E663BFE3-C54D-53EF-0902-B4BE42F31E5D}"/>
               </a:ext>
             </a:extLst>
           </p:cNvPr>
@@ -4290,7 +5262,7 @@
         <p:spPr>
           <a:xfrm>
             <a:off x="838200" y="1825625"/>
-            <a:ext cx="4494843" cy="1325563"/>
+            <a:ext cx="4306556" cy="4351338"/>
           </a:xfrm>
           <a:prstGeom prst="rect">
             <a:avLst/>
@@ -4467,11 +5439,391 @@
           <a:p>
             <a:r>
               <a:rPr lang="en-US" dirty="0"/>
-              <a:t>hi</a:t>
-            </a:r>
-          </a:p>
-        </p:txBody>
-      </p:sp>
+              <a:t>Backward selection identified smoking status for males</a:t>
+            </a:r>
+          </a:p>
+          <a:p>
+            <a:pPr lvl="1"/>
+            <a:r>
+              <a:rPr lang="en-US" dirty="0"/>
+              <a:t>Also included for females for comparability</a:t>
+            </a:r>
+          </a:p>
+          <a:p>
+            <a:r>
+              <a:rPr lang="en-US" dirty="0"/>
+              <a:t>PH assumptions generally met for both sexes</a:t>
+            </a:r>
+          </a:p>
+          <a:p>
+            <a:pPr lvl="1"/>
+            <a:r>
+              <a:rPr lang="en-US" dirty="0"/>
+              <a:t>Global tests: </a:t>
+            </a:r>
+          </a:p>
+          <a:p>
+            <a:pPr lvl="2"/>
+            <a:r>
+              <a:rPr lang="en-US" dirty="0"/>
+              <a:t>Males: 0.2277</a:t>
+            </a:r>
+          </a:p>
+          <a:p>
+            <a:pPr lvl="2"/>
+            <a:r>
+              <a:rPr lang="en-US" dirty="0"/>
+              <a:t>Females: 0.9575</a:t>
+            </a:r>
+          </a:p>
+          <a:p>
+            <a:endParaRPr lang="en-US" dirty="0"/>
+          </a:p>
+        </p:txBody>
+      </p:sp>
+    </p:spTree>
+    <p:extLst>
+      <p:ext uri="{BB962C8B-B14F-4D97-AF65-F5344CB8AC3E}">
+        <p14:creationId xmlns:p14="http://schemas.microsoft.com/office/powerpoint/2010/main" val="2512102046"/>
+      </p:ext>
+    </p:extLst>
+  </p:cSld>
+  <p:clrMapOvr>
+    <a:masterClrMapping/>
+  </p:clrMapOvr>
+</p:sld>
+</file>
+
+<file path=ppt/slides/slide6.xml><?xml version="1.0" encoding="utf-8"?>
+<p:sld xmlns:a="http://schemas.openxmlformats.org/drawingml/2006/main" xmlns:r="http://schemas.openxmlformats.org/officeDocument/2006/relationships" xmlns:p="http://schemas.openxmlformats.org/presentationml/2006/main">
+  <p:cSld>
+    <p:spTree>
+      <p:nvGrpSpPr>
+        <p:cNvPr id="1" name=""/>
+        <p:cNvGrpSpPr/>
+        <p:nvPr/>
+      </p:nvGrpSpPr>
+      <p:grpSpPr>
+        <a:xfrm>
+          <a:off x="0" y="0"/>
+          <a:ext cx="0" cy="0"/>
+          <a:chOff x="0" y="0"/>
+          <a:chExt cx="0" cy="0"/>
+        </a:xfrm>
+      </p:grpSpPr>
+      <p:sp>
+        <p:nvSpPr>
+          <p:cNvPr id="2" name="Title 1">
+            <a:extLst>
+              <a:ext uri="{FF2B5EF4-FFF2-40B4-BE49-F238E27FC236}">
+                <a16:creationId xmlns:a16="http://schemas.microsoft.com/office/drawing/2014/main" id="{6AA379F0-2156-E489-D552-D78C999D38FB}"/>
+              </a:ext>
+            </a:extLst>
+          </p:cNvPr>
+          <p:cNvSpPr>
+            <a:spLocks noGrp="1"/>
+          </p:cNvSpPr>
+          <p:nvPr>
+            <p:ph type="title"/>
+          </p:nvPr>
+        </p:nvSpPr>
+        <p:spPr>
+          <a:xfrm>
+            <a:off x="838200" y="365124"/>
+            <a:ext cx="10515600" cy="1325563"/>
+          </a:xfrm>
+        </p:spPr>
+        <p:txBody>
+          <a:bodyPr/>
+          <a:lstStyle/>
+          <a:p>
+            <a:r>
+              <a:rPr lang="en-US" dirty="0"/>
+              <a:t>Results</a:t>
+            </a:r>
+          </a:p>
+        </p:txBody>
+      </p:sp>
+      <p:sp>
+        <p:nvSpPr>
+          <p:cNvPr id="8" name="Content Placeholder 2">
+            <a:extLst>
+              <a:ext uri="{FF2B5EF4-FFF2-40B4-BE49-F238E27FC236}">
+                <a16:creationId xmlns:a16="http://schemas.microsoft.com/office/drawing/2014/main" id="{396C594F-3E58-EF8A-C4BB-11AA81A1CEAE}"/>
+              </a:ext>
+            </a:extLst>
+          </p:cNvPr>
+          <p:cNvSpPr txBox="1">
+            <a:spLocks/>
+          </p:cNvSpPr>
+          <p:nvPr/>
+        </p:nvSpPr>
+        <p:spPr>
+          <a:xfrm>
+            <a:off x="838200" y="1541383"/>
+            <a:ext cx="5632663" cy="1599871"/>
+          </a:xfrm>
+          <a:prstGeom prst="rect">
+            <a:avLst/>
+          </a:prstGeom>
+        </p:spPr>
+        <p:txBody>
+          <a:bodyPr vert="horz" lIns="91440" tIns="45720" rIns="91440" bIns="45720" rtlCol="0">
+            <a:normAutofit/>
+          </a:bodyPr>
+          <a:lstStyle>
+            <a:lvl1pPr marL="228600" indent="-228600" algn="l" defTabSz="914400" rtl="0" eaLnBrk="1" latinLnBrk="0" hangingPunct="1">
+              <a:lnSpc>
+                <a:spcPct val="90000"/>
+              </a:lnSpc>
+              <a:spcBef>
+                <a:spcPts val="1000"/>
+              </a:spcBef>
+              <a:buFont typeface="Arial" panose="020B0604020202020204" pitchFamily="34" charset="0"/>
+              <a:buChar char="•"/>
+              <a:defRPr sz="2800" kern="1200">
+                <a:solidFill>
+                  <a:schemeClr val="tx1"/>
+                </a:solidFill>
+                <a:latin typeface="+mn-lt"/>
+                <a:ea typeface="+mn-ea"/>
+                <a:cs typeface="+mn-cs"/>
+              </a:defRPr>
+            </a:lvl1pPr>
+            <a:lvl2pPr marL="685800" indent="-228600" algn="l" defTabSz="914400" rtl="0" eaLnBrk="1" latinLnBrk="0" hangingPunct="1">
+              <a:lnSpc>
+                <a:spcPct val="90000"/>
+              </a:lnSpc>
+              <a:spcBef>
+                <a:spcPts val="500"/>
+              </a:spcBef>
+              <a:buFont typeface="Arial" panose="020B0604020202020204" pitchFamily="34" charset="0"/>
+              <a:buChar char="•"/>
+              <a:defRPr sz="2400" kern="1200">
+                <a:solidFill>
+                  <a:schemeClr val="tx1"/>
+                </a:solidFill>
+                <a:latin typeface="+mn-lt"/>
+                <a:ea typeface="+mn-ea"/>
+                <a:cs typeface="+mn-cs"/>
+              </a:defRPr>
+            </a:lvl2pPr>
+            <a:lvl3pPr marL="1143000" indent="-228600" algn="l" defTabSz="914400" rtl="0" eaLnBrk="1" latinLnBrk="0" hangingPunct="1">
+              <a:lnSpc>
+                <a:spcPct val="90000"/>
+              </a:lnSpc>
+              <a:spcBef>
+                <a:spcPts val="500"/>
+              </a:spcBef>
+              <a:buFont typeface="Arial" panose="020B0604020202020204" pitchFamily="34" charset="0"/>
+              <a:buChar char="•"/>
+              <a:defRPr sz="2000" kern="1200">
+                <a:solidFill>
+                  <a:schemeClr val="tx1"/>
+                </a:solidFill>
+                <a:latin typeface="+mn-lt"/>
+                <a:ea typeface="+mn-ea"/>
+                <a:cs typeface="+mn-cs"/>
+              </a:defRPr>
+            </a:lvl3pPr>
+            <a:lvl4pPr marL="1600200" indent="-228600" algn="l" defTabSz="914400" rtl="0" eaLnBrk="1" latinLnBrk="0" hangingPunct="1">
+              <a:lnSpc>
+                <a:spcPct val="90000"/>
+              </a:lnSpc>
+              <a:spcBef>
+                <a:spcPts val="500"/>
+              </a:spcBef>
+              <a:buFont typeface="Arial" panose="020B0604020202020204" pitchFamily="34" charset="0"/>
+              <a:buChar char="•"/>
+              <a:defRPr sz="1800" kern="1200">
+                <a:solidFill>
+                  <a:schemeClr val="tx1"/>
+                </a:solidFill>
+                <a:latin typeface="+mn-lt"/>
+                <a:ea typeface="+mn-ea"/>
+                <a:cs typeface="+mn-cs"/>
+              </a:defRPr>
+            </a:lvl4pPr>
+            <a:lvl5pPr marL="2057400" indent="-228600" algn="l" defTabSz="914400" rtl="0" eaLnBrk="1" latinLnBrk="0" hangingPunct="1">
+              <a:lnSpc>
+                <a:spcPct val="90000"/>
+              </a:lnSpc>
+              <a:spcBef>
+                <a:spcPts val="500"/>
+              </a:spcBef>
+              <a:buFont typeface="Arial" panose="020B0604020202020204" pitchFamily="34" charset="0"/>
+              <a:buChar char="•"/>
+              <a:defRPr sz="1800" kern="1200">
+                <a:solidFill>
+                  <a:schemeClr val="tx1"/>
+                </a:solidFill>
+                <a:latin typeface="+mn-lt"/>
+                <a:ea typeface="+mn-ea"/>
+                <a:cs typeface="+mn-cs"/>
+              </a:defRPr>
+            </a:lvl5pPr>
+            <a:lvl6pPr marL="2514600" indent="-228600" algn="l" defTabSz="914400" rtl="0" eaLnBrk="1" latinLnBrk="0" hangingPunct="1">
+              <a:lnSpc>
+                <a:spcPct val="90000"/>
+              </a:lnSpc>
+              <a:spcBef>
+                <a:spcPts val="500"/>
+              </a:spcBef>
+              <a:buFont typeface="Arial" panose="020B0604020202020204" pitchFamily="34" charset="0"/>
+              <a:buChar char="•"/>
+              <a:defRPr sz="1800" kern="1200">
+                <a:solidFill>
+                  <a:schemeClr val="tx1"/>
+                </a:solidFill>
+                <a:latin typeface="+mn-lt"/>
+                <a:ea typeface="+mn-ea"/>
+                <a:cs typeface="+mn-cs"/>
+              </a:defRPr>
+            </a:lvl6pPr>
+            <a:lvl7pPr marL="2971800" indent="-228600" algn="l" defTabSz="914400" rtl="0" eaLnBrk="1" latinLnBrk="0" hangingPunct="1">
+              <a:lnSpc>
+                <a:spcPct val="90000"/>
+              </a:lnSpc>
+              <a:spcBef>
+                <a:spcPts val="500"/>
+              </a:spcBef>
+              <a:buFont typeface="Arial" panose="020B0604020202020204" pitchFamily="34" charset="0"/>
+              <a:buChar char="•"/>
+              <a:defRPr sz="1800" kern="1200">
+                <a:solidFill>
+                  <a:schemeClr val="tx1"/>
+                </a:solidFill>
+                <a:latin typeface="+mn-lt"/>
+                <a:ea typeface="+mn-ea"/>
+                <a:cs typeface="+mn-cs"/>
+              </a:defRPr>
+            </a:lvl7pPr>
+            <a:lvl8pPr marL="3429000" indent="-228600" algn="l" defTabSz="914400" rtl="0" eaLnBrk="1" latinLnBrk="0" hangingPunct="1">
+              <a:lnSpc>
+                <a:spcPct val="90000"/>
+              </a:lnSpc>
+              <a:spcBef>
+                <a:spcPts val="500"/>
+              </a:spcBef>
+              <a:buFont typeface="Arial" panose="020B0604020202020204" pitchFamily="34" charset="0"/>
+              <a:buChar char="•"/>
+              <a:defRPr sz="1800" kern="1200">
+                <a:solidFill>
+                  <a:schemeClr val="tx1"/>
+                </a:solidFill>
+                <a:latin typeface="+mn-lt"/>
+                <a:ea typeface="+mn-ea"/>
+                <a:cs typeface="+mn-cs"/>
+              </a:defRPr>
+            </a:lvl8pPr>
+            <a:lvl9pPr marL="3886200" indent="-228600" algn="l" defTabSz="914400" rtl="0" eaLnBrk="1" latinLnBrk="0" hangingPunct="1">
+              <a:lnSpc>
+                <a:spcPct val="90000"/>
+              </a:lnSpc>
+              <a:spcBef>
+                <a:spcPts val="500"/>
+              </a:spcBef>
+              <a:buFont typeface="Arial" panose="020B0604020202020204" pitchFamily="34" charset="0"/>
+              <a:buChar char="•"/>
+              <a:defRPr sz="1800" kern="1200">
+                <a:solidFill>
+                  <a:schemeClr val="tx1"/>
+                </a:solidFill>
+                <a:latin typeface="+mn-lt"/>
+                <a:ea typeface="+mn-ea"/>
+                <a:cs typeface="+mn-cs"/>
+              </a:defRPr>
+            </a:lvl9pPr>
+          </a:lstStyle>
+          <a:p>
+            <a:r>
+              <a:rPr lang="en-US" dirty="0"/>
+              <a:t>Stroke risk increases with age</a:t>
+            </a:r>
+          </a:p>
+          <a:p>
+            <a:r>
+              <a:rPr lang="en-US" dirty="0"/>
+              <a:t>Combined high BP + diabetes yields the highest risk</a:t>
+            </a:r>
+          </a:p>
+        </p:txBody>
+      </p:sp>
+      <p:pic>
+        <p:nvPicPr>
+          <p:cNvPr id="9" name="Content Placeholder 8">
+            <a:extLst>
+              <a:ext uri="{FF2B5EF4-FFF2-40B4-BE49-F238E27FC236}">
+                <a16:creationId xmlns:a16="http://schemas.microsoft.com/office/drawing/2014/main" id="{A6D67317-4ABE-579B-78EE-821A78042D5E}"/>
+              </a:ext>
+            </a:extLst>
+          </p:cNvPr>
+          <p:cNvPicPr>
+            <a:picLocks noGrp="1" noChangeAspect="1"/>
+          </p:cNvPicPr>
+          <p:nvPr>
+            <p:ph idx="1"/>
+          </p:nvPr>
+        </p:nvPicPr>
+        <p:blipFill>
+          <a:blip r:embed="rId3">
+            <a:extLst>
+              <a:ext uri="{28A0092B-C50C-407E-A947-70E740481C1C}">
+                <a14:useLocalDpi xmlns:a14="http://schemas.microsoft.com/office/drawing/2010/main" val="0"/>
+              </a:ext>
+            </a:extLst>
+          </a:blip>
+          <a:stretch>
+            <a:fillRect/>
+          </a:stretch>
+        </p:blipFill>
+        <p:spPr>
+          <a:xfrm>
+            <a:off x="6470863" y="858316"/>
+            <a:ext cx="5637401" cy="5637401"/>
+          </a:xfrm>
+          <a:prstGeom prst="rect">
+            <a:avLst/>
+          </a:prstGeom>
+        </p:spPr>
+      </p:pic>
+      <p:pic>
+        <p:nvPicPr>
+          <p:cNvPr id="11" name="Picture 10">
+            <a:extLst>
+              <a:ext uri="{FF2B5EF4-FFF2-40B4-BE49-F238E27FC236}">
+                <a16:creationId xmlns:a16="http://schemas.microsoft.com/office/drawing/2014/main" id="{2AD7504C-248D-B497-B29B-74D544089112}"/>
+              </a:ext>
+            </a:extLst>
+          </p:cNvPr>
+          <p:cNvPicPr>
+            <a:picLocks noChangeAspect="1"/>
+          </p:cNvPicPr>
+          <p:nvPr/>
+        </p:nvPicPr>
+        <p:blipFill>
+          <a:blip r:embed="rId4">
+            <a:extLst>
+              <a:ext uri="{28A0092B-C50C-407E-A947-70E740481C1C}">
+                <a14:useLocalDpi xmlns:a14="http://schemas.microsoft.com/office/drawing/2010/main" val="0"/>
+              </a:ext>
+            </a:extLst>
+          </a:blip>
+          <a:srcRect b="21720"/>
+          <a:stretch>
+            <a:fillRect/>
+          </a:stretch>
+        </p:blipFill>
+        <p:spPr>
+          <a:xfrm>
+            <a:off x="0" y="2991949"/>
+            <a:ext cx="6470863" cy="3866051"/>
+          </a:xfrm>
+          <a:prstGeom prst="rect">
+            <a:avLst/>
+          </a:prstGeom>
+        </p:spPr>
+      </p:pic>
     </p:spTree>
     <p:extLst>
       <p:ext uri="{BB962C8B-B14F-4D97-AF65-F5344CB8AC3E}">
@@ -4546,14 +5898,34 @@
             <p:ph idx="1"/>
           </p:nvPr>
         </p:nvSpPr>
-        <p:spPr/>
-        <p:txBody>
-          <a:bodyPr/>
+        <p:spPr>
+          <a:xfrm>
+            <a:off x="838200" y="1825625"/>
+            <a:ext cx="4495800" cy="4667250"/>
+          </a:xfrm>
+        </p:spPr>
+        <p:txBody>
+          <a:bodyPr>
+            <a:normAutofit fontScale="92500"/>
+          </a:bodyPr>
           <a:lstStyle/>
           <a:p>
             <a:r>
               <a:rPr lang="en-US" dirty="0"/>
-              <a:t>Time Varying Covariates</a:t>
+              <a:t>Systolic BP is the strongest baseline predictor of stroke</a:t>
+            </a:r>
+          </a:p>
+          <a:p>
+            <a:r>
+              <a:rPr lang="en-US" dirty="0"/>
+              <a:t>Diabetes contributes substantial risk, particularly in males</a:t>
+            </a:r>
+          </a:p>
+          <a:p>
+            <a:pPr lvl="1"/>
+            <a:r>
+              <a:rPr lang="en-US" dirty="0"/>
+              <a:t>Time varying patterns for both predictors are present</a:t>
             </a:r>
           </a:p>
           <a:p>
@@ -4562,14 +5934,35 @@
               <a:t>Limitations</a:t>
             </a:r>
           </a:p>
+          <a:p>
+            <a:pPr lvl="1"/>
+            <a:r>
+              <a:rPr lang="en-US" dirty="0"/>
+              <a:t>Complete case analysis</a:t>
+            </a:r>
+          </a:p>
+          <a:p>
+            <a:pPr lvl="1"/>
+            <a:r>
+              <a:rPr lang="en-US" dirty="0"/>
+              <a:t>No competing risks</a:t>
+            </a:r>
+          </a:p>
+          <a:p>
+            <a:pPr lvl="1"/>
+            <a:r>
+              <a:rPr lang="en-US" dirty="0"/>
+              <a:t>Cohort demographics limit generalizability</a:t>
+            </a:r>
+          </a:p>
         </p:txBody>
       </p:sp>
       <p:pic>
         <p:nvPicPr>
-          <p:cNvPr id="5" name="Picture 4">
-            <a:extLst>
-              <a:ext uri="{FF2B5EF4-FFF2-40B4-BE49-F238E27FC236}">
-                <a16:creationId xmlns:a16="http://schemas.microsoft.com/office/drawing/2014/main" id="{9CEA26D0-3315-CE79-4822-834DE7840E31}"/>
+          <p:cNvPr id="6" name="Picture 5">
+            <a:extLst>
+              <a:ext uri="{FF2B5EF4-FFF2-40B4-BE49-F238E27FC236}">
+                <a16:creationId xmlns:a16="http://schemas.microsoft.com/office/drawing/2014/main" id="{567BF916-F4D4-0811-0248-421F8741936A}"/>
               </a:ext>
             </a:extLst>
           </p:cNvPr>
@@ -4579,15 +5972,21 @@
           <p:nvPr/>
         </p:nvPicPr>
         <p:blipFill>
-          <a:blip r:embed="rId2"/>
+          <a:blip r:embed="rId3">
+            <a:extLst>
+              <a:ext uri="{28A0092B-C50C-407E-A947-70E740481C1C}">
+                <a14:useLocalDpi xmlns:a14="http://schemas.microsoft.com/office/drawing/2010/main" val="0"/>
+              </a:ext>
+            </a:extLst>
+          </a:blip>
           <a:stretch>
             <a:fillRect/>
           </a:stretch>
         </p:blipFill>
         <p:spPr>
           <a:xfrm>
-            <a:off x="5363942" y="2141537"/>
-            <a:ext cx="6552432" cy="4351338"/>
+            <a:off x="5334000" y="0"/>
+            <a:ext cx="6858000" cy="6858000"/>
           </a:xfrm>
           <a:prstGeom prst="rect">
             <a:avLst/>
@@ -4920,4 +6319,319 @@
     </a:ext>
   </a:extLst>
 </a:theme>
+</file>
+
+<file path=ppt/theme/theme2.xml><?xml version="1.0" encoding="utf-8"?>
+<a:theme xmlns:a="http://schemas.openxmlformats.org/drawingml/2006/main" name="Office Theme">
+  <a:themeElements>
+    <a:clrScheme name="Office">
+      <a:dk1>
+        <a:sysClr val="windowText" lastClr="000000"/>
+      </a:dk1>
+      <a:lt1>
+        <a:sysClr val="window" lastClr="FFFFFF"/>
+      </a:lt1>
+      <a:dk2>
+        <a:srgbClr val="0E2841"/>
+      </a:dk2>
+      <a:lt2>
+        <a:srgbClr val="E8E8E8"/>
+      </a:lt2>
+      <a:accent1>
+        <a:srgbClr val="156082"/>
+      </a:accent1>
+      <a:accent2>
+        <a:srgbClr val="E97132"/>
+      </a:accent2>
+      <a:accent3>
+        <a:srgbClr val="196B24"/>
+      </a:accent3>
+      <a:accent4>
+        <a:srgbClr val="0F9ED5"/>
+      </a:accent4>
+      <a:accent5>
+        <a:srgbClr val="A02B93"/>
+      </a:accent5>
+      <a:accent6>
+        <a:srgbClr val="4EA72E"/>
+      </a:accent6>
+      <a:hlink>
+        <a:srgbClr val="467886"/>
+      </a:hlink>
+      <a:folHlink>
+        <a:srgbClr val="96607D"/>
+      </a:folHlink>
+    </a:clrScheme>
+    <a:fontScheme name="Office">
+      <a:majorFont>
+        <a:latin typeface="Aptos Display" panose="02110004020202020204"/>
+        <a:ea typeface=""/>
+        <a:cs typeface=""/>
+        <a:font script="Jpan" typeface="游ゴシック Light"/>
+        <a:font script="Hang" typeface="맑은 고딕"/>
+        <a:font script="Hans" typeface="等线 Light"/>
+        <a:font script="Hant" typeface="新細明體"/>
+        <a:font script="Arab" typeface="Times New Roman"/>
+        <a:font script="Hebr" typeface="Times New Roman"/>
+        <a:font script="Thai" typeface="Angsana New"/>
+        <a:font script="Ethi" typeface="Nyala"/>
+        <a:font script="Beng" typeface="Vrinda"/>
+        <a:font script="Gujr" typeface="Shruti"/>
+        <a:font script="Khmr" typeface="MoolBoran"/>
+        <a:font script="Knda" typeface="Tunga"/>
+        <a:font script="Guru" typeface="Raavi"/>
+        <a:font script="Cans" typeface="Euphemia"/>
+        <a:font script="Cher" typeface="Plantagenet Cherokee"/>
+        <a:font script="Yiii" typeface="Microsoft Yi Baiti"/>
+        <a:font script="Tibt" typeface="Microsoft Himalaya"/>
+        <a:font script="Thaa" typeface="MV Boli"/>
+        <a:font script="Deva" typeface="Mangal"/>
+        <a:font script="Telu" typeface="Gautami"/>
+        <a:font script="Taml" typeface="Latha"/>
+        <a:font script="Syrc" typeface="Estrangelo Edessa"/>
+        <a:font script="Orya" typeface="Kalinga"/>
+        <a:font script="Mlym" typeface="Kartika"/>
+        <a:font script="Laoo" typeface="DokChampa"/>
+        <a:font script="Sinh" typeface="Iskoola Pota"/>
+        <a:font script="Mong" typeface="Mongolian Baiti"/>
+        <a:font script="Viet" typeface="Times New Roman"/>
+        <a:font script="Uigh" typeface="Microsoft Uighur"/>
+        <a:font script="Geor" typeface="Sylfaen"/>
+        <a:font script="Armn" typeface="Arial"/>
+        <a:font script="Bugi" typeface="Leelawadee UI"/>
+        <a:font script="Bopo" typeface="Microsoft JhengHei"/>
+        <a:font script="Java" typeface="Javanese Text"/>
+        <a:font script="Lisu" typeface="Segoe UI"/>
+        <a:font script="Mymr" typeface="Myanmar Text"/>
+        <a:font script="Nkoo" typeface="Ebrima"/>
+        <a:font script="Olck" typeface="Nirmala UI"/>
+        <a:font script="Osma" typeface="Ebrima"/>
+        <a:font script="Phag" typeface="Phagspa"/>
+        <a:font script="Syrn" typeface="Estrangelo Edessa"/>
+        <a:font script="Syrj" typeface="Estrangelo Edessa"/>
+        <a:font script="Syre" typeface="Estrangelo Edessa"/>
+        <a:font script="Sora" typeface="Nirmala UI"/>
+        <a:font script="Tale" typeface="Microsoft Tai Le"/>
+        <a:font script="Talu" typeface="Microsoft New Tai Lue"/>
+        <a:font script="Tfng" typeface="Ebrima"/>
+      </a:majorFont>
+      <a:minorFont>
+        <a:latin typeface="Aptos" panose="02110004020202020204"/>
+        <a:ea typeface=""/>
+        <a:cs typeface=""/>
+        <a:font script="Jpan" typeface="游ゴシック"/>
+        <a:font script="Hang" typeface="맑은 고딕"/>
+        <a:font script="Hans" typeface="等线"/>
+        <a:font script="Hant" typeface="新細明體"/>
+        <a:font script="Arab" typeface="Arial"/>
+        <a:font script="Hebr" typeface="Arial"/>
+        <a:font script="Thai" typeface="Cordia New"/>
+        <a:font script="Ethi" typeface="Nyala"/>
+        <a:font script="Beng" typeface="Vrinda"/>
+        <a:font script="Gujr" typeface="Shruti"/>
+        <a:font script="Khmr" typeface="DaunPenh"/>
+        <a:font script="Knda" typeface="Tunga"/>
+        <a:font script="Guru" typeface="Raavi"/>
+        <a:font script="Cans" typeface="Euphemia"/>
+        <a:font script="Cher" typeface="Plantagenet Cherokee"/>
+        <a:font script="Yiii" typeface="Microsoft Yi Baiti"/>
+        <a:font script="Tibt" typeface="Microsoft Himalaya"/>
+        <a:font script="Thaa" typeface="MV Boli"/>
+        <a:font script="Deva" typeface="Mangal"/>
+        <a:font script="Telu" typeface="Gautami"/>
+        <a:font script="Taml" typeface="Latha"/>
+        <a:font script="Syrc" typeface="Estrangelo Edessa"/>
+        <a:font script="Orya" typeface="Kalinga"/>
+        <a:font script="Mlym" typeface="Kartika"/>
+        <a:font script="Laoo" typeface="DokChampa"/>
+        <a:font script="Sinh" typeface="Iskoola Pota"/>
+        <a:font script="Mong" typeface="Mongolian Baiti"/>
+        <a:font script="Viet" typeface="Arial"/>
+        <a:font script="Uigh" typeface="Microsoft Uighur"/>
+        <a:font script="Geor" typeface="Sylfaen"/>
+        <a:font script="Armn" typeface="Arial"/>
+        <a:font script="Bugi" typeface="Leelawadee UI"/>
+        <a:font script="Bopo" typeface="Microsoft JhengHei"/>
+        <a:font script="Java" typeface="Javanese Text"/>
+        <a:font script="Lisu" typeface="Segoe UI"/>
+        <a:font script="Mymr" typeface="Myanmar Text"/>
+        <a:font script="Nkoo" typeface="Ebrima"/>
+        <a:font script="Olck" typeface="Nirmala UI"/>
+        <a:font script="Osma" typeface="Ebrima"/>
+        <a:font script="Phag" typeface="Phagspa"/>
+        <a:font script="Syrn" typeface="Estrangelo Edessa"/>
+        <a:font script="Syrj" typeface="Estrangelo Edessa"/>
+        <a:font script="Syre" typeface="Estrangelo Edessa"/>
+        <a:font script="Sora" typeface="Nirmala UI"/>
+        <a:font script="Tale" typeface="Microsoft Tai Le"/>
+        <a:font script="Talu" typeface="Microsoft New Tai Lue"/>
+        <a:font script="Tfng" typeface="Ebrima"/>
+      </a:minorFont>
+    </a:fontScheme>
+    <a:fmtScheme name="Office">
+      <a:fillStyleLst>
+        <a:solidFill>
+          <a:schemeClr val="phClr"/>
+        </a:solidFill>
+        <a:gradFill rotWithShape="1">
+          <a:gsLst>
+            <a:gs pos="0">
+              <a:schemeClr val="phClr">
+                <a:lumMod val="110000"/>
+                <a:satMod val="105000"/>
+                <a:tint val="67000"/>
+              </a:schemeClr>
+            </a:gs>
+            <a:gs pos="50000">
+              <a:schemeClr val="phClr">
+                <a:lumMod val="105000"/>
+                <a:satMod val="103000"/>
+                <a:tint val="73000"/>
+              </a:schemeClr>
+            </a:gs>
+            <a:gs pos="100000">
+              <a:schemeClr val="phClr">
+                <a:lumMod val="105000"/>
+                <a:satMod val="109000"/>
+                <a:tint val="81000"/>
+              </a:schemeClr>
+            </a:gs>
+          </a:gsLst>
+          <a:lin ang="5400000" scaled="0"/>
+        </a:gradFill>
+        <a:gradFill rotWithShape="1">
+          <a:gsLst>
+            <a:gs pos="0">
+              <a:schemeClr val="phClr">
+                <a:satMod val="103000"/>
+                <a:lumMod val="102000"/>
+                <a:tint val="94000"/>
+              </a:schemeClr>
+            </a:gs>
+            <a:gs pos="50000">
+              <a:schemeClr val="phClr">
+                <a:satMod val="110000"/>
+                <a:lumMod val="100000"/>
+                <a:shade val="100000"/>
+              </a:schemeClr>
+            </a:gs>
+            <a:gs pos="100000">
+              <a:schemeClr val="phClr">
+                <a:lumMod val="99000"/>
+                <a:satMod val="120000"/>
+                <a:shade val="78000"/>
+              </a:schemeClr>
+            </a:gs>
+          </a:gsLst>
+          <a:lin ang="5400000" scaled="0"/>
+        </a:gradFill>
+      </a:fillStyleLst>
+      <a:lnStyleLst>
+        <a:ln w="12700" cap="flat" cmpd="sng" algn="ctr">
+          <a:solidFill>
+            <a:schemeClr val="phClr"/>
+          </a:solidFill>
+          <a:prstDash val="solid"/>
+          <a:miter lim="800000"/>
+        </a:ln>
+        <a:ln w="19050" cap="flat" cmpd="sng" algn="ctr">
+          <a:solidFill>
+            <a:schemeClr val="phClr"/>
+          </a:solidFill>
+          <a:prstDash val="solid"/>
+          <a:miter lim="800000"/>
+        </a:ln>
+        <a:ln w="25400" cap="flat" cmpd="sng" algn="ctr">
+          <a:solidFill>
+            <a:schemeClr val="phClr"/>
+          </a:solidFill>
+          <a:prstDash val="solid"/>
+          <a:miter lim="800000"/>
+        </a:ln>
+      </a:lnStyleLst>
+      <a:effectStyleLst>
+        <a:effectStyle>
+          <a:effectLst/>
+        </a:effectStyle>
+        <a:effectStyle>
+          <a:effectLst/>
+        </a:effectStyle>
+        <a:effectStyle>
+          <a:effectLst>
+            <a:outerShdw blurRad="57150" dist="19050" dir="5400000" algn="ctr" rotWithShape="0">
+              <a:srgbClr val="000000">
+                <a:alpha val="63000"/>
+              </a:srgbClr>
+            </a:outerShdw>
+          </a:effectLst>
+        </a:effectStyle>
+      </a:effectStyleLst>
+      <a:bgFillStyleLst>
+        <a:solidFill>
+          <a:schemeClr val="phClr"/>
+        </a:solidFill>
+        <a:solidFill>
+          <a:schemeClr val="phClr">
+            <a:tint val="95000"/>
+            <a:satMod val="170000"/>
+          </a:schemeClr>
+        </a:solidFill>
+        <a:gradFill rotWithShape="1">
+          <a:gsLst>
+            <a:gs pos="0">
+              <a:schemeClr val="phClr">
+                <a:tint val="93000"/>
+                <a:satMod val="150000"/>
+                <a:shade val="98000"/>
+                <a:lumMod val="102000"/>
+              </a:schemeClr>
+            </a:gs>
+            <a:gs pos="50000">
+              <a:schemeClr val="phClr">
+                <a:tint val="98000"/>
+                <a:satMod val="130000"/>
+                <a:shade val="90000"/>
+                <a:lumMod val="103000"/>
+              </a:schemeClr>
+            </a:gs>
+            <a:gs pos="100000">
+              <a:schemeClr val="phClr">
+                <a:shade val="63000"/>
+                <a:satMod val="120000"/>
+              </a:schemeClr>
+            </a:gs>
+          </a:gsLst>
+          <a:lin ang="5400000" scaled="0"/>
+        </a:gradFill>
+      </a:bgFillStyleLst>
+    </a:fmtScheme>
+  </a:themeElements>
+  <a:objectDefaults>
+    <a:lnDef>
+      <a:spPr/>
+      <a:bodyPr/>
+      <a:lstStyle/>
+      <a:style>
+        <a:lnRef idx="2">
+          <a:schemeClr val="accent1"/>
+        </a:lnRef>
+        <a:fillRef idx="0">
+          <a:schemeClr val="accent1"/>
+        </a:fillRef>
+        <a:effectRef idx="1">
+          <a:schemeClr val="accent1"/>
+        </a:effectRef>
+        <a:fontRef idx="minor">
+          <a:schemeClr val="tx1"/>
+        </a:fontRef>
+      </a:style>
+    </a:lnDef>
+  </a:objectDefaults>
+  <a:extraClrSchemeLst/>
+  <a:extLst>
+    <a:ext uri="{05A4C25C-085E-4340-85A3-A5531E510DB2}">
+      <thm15:themeFamily xmlns:thm15="http://schemas.microsoft.com/office/thememl/2012/main" name="Office Theme" id="{2E142A2C-CD16-42D6-873A-C26D2A0506FA}" vid="{1BDDFF52-6CD6-40A5-AB3C-68EB2F1E4D0A}"/>
+    </a:ext>
+  </a:extLst>
+</a:theme>
 </file>